--- a/proposals/2026-11_nlrc-ai-labor-commission/nlrc_정량제안서.pptx
+++ b/proposals/2026-11_nlrc-ai-labor-commission/nlrc_정량제안서.pptx
@@ -18204,7 +18204,7 @@
                           <a:ea typeface="맑은 고딕"/>
                           <a:cs typeface="맑은 고딕"/>
                         </a:rPr>
-                        <a:t>SKHy '26년 M15X Ph4 차세대 제조 시스템 _FAB MOS</a:t>
+                        <a:t>SK가스 26년 Trading AI 사업(PP)</a:t>
                       </a:r>
                     </a:p>
                   </a:txBody>
@@ -18259,7 +18259,7 @@
                           <a:ea typeface="맑은 고딕"/>
                           <a:cs typeface="맑은 고딕"/>
                         </a:rPr>
-                        <a:t>정보시스템 구축</a:t>
+                        <a:t>AI · 생성형AI</a:t>
                       </a:r>
                     </a:p>
                   </a:txBody>
@@ -18314,7 +18314,7 @@
                           <a:ea typeface="맑은 고딕"/>
                           <a:cs typeface="맑은 고딕"/>
                         </a:rPr>
-                        <a:t>2026.06.30</a:t>
+                        <a:t>2026.07.24</a:t>
                       </a:r>
                     </a:p>
                   </a:txBody>
@@ -18369,7 +18369,7 @@
                           <a:ea typeface="맑은 고딕"/>
                           <a:cs typeface="맑은 고딕"/>
                         </a:rPr>
-                        <a:t>27</a:t>
+                        <a:t>32</a:t>
                       </a:r>
                     </a:p>
                   </a:txBody>
@@ -18536,7 +18536,7 @@
                           <a:ea typeface="맑은 고딕"/>
                           <a:cs typeface="맑은 고딕"/>
                         </a:rPr>
-                        <a:t>SKHy '26년 M14 차세대 제조 시스템 확산_FABMOS</a:t>
+                        <a:t>SKHy '26년 용인 Y1(M17) 제조 DT 시스템 Ph1_FAB MOS</a:t>
                       </a:r>
                     </a:p>
                   </a:txBody>
@@ -18701,7 +18701,7 @@
                           <a:ea typeface="맑은 고딕"/>
                           <a:cs typeface="맑은 고딕"/>
                         </a:rPr>
-                        <a:t>33</a:t>
+                        <a:t>38</a:t>
                       </a:r>
                     </a:p>
                   </a:txBody>
@@ -19200,7 +19200,7 @@
                           <a:ea typeface="맑은 고딕"/>
                           <a:cs typeface="맑은 고딕"/>
                         </a:rPr>
-                        <a:t>SKHy '26년 용인 Y1(M17) 제조 DT 시스템 Ph1_FAB MOS</a:t>
+                        <a:t>SKHy '26년 M14 차세대 제조 시스템 확산_FABMOS</a:t>
                       </a:r>
                     </a:p>
                   </a:txBody>
@@ -19365,7 +19365,7 @@
                           <a:ea typeface="맑은 고딕"/>
                           <a:cs typeface="맑은 고딕"/>
                         </a:rPr>
-                        <a:t>38</a:t>
+                        <a:t>33</a:t>
                       </a:r>
                     </a:p>
                   </a:txBody>
@@ -19532,7 +19532,7 @@
                           <a:ea typeface="맑은 고딕"/>
                           <a:cs typeface="맑은 고딕"/>
                         </a:rPr>
-                        <a:t>SK가스 26년 Trading AI 사업(PP)</a:t>
+                        <a:t>SKHy '26년 M15X Ph4 차세대 제조 시스템 _FAB MOS</a:t>
                       </a:r>
                     </a:p>
                   </a:txBody>
@@ -19587,7 +19587,7 @@
                           <a:ea typeface="맑은 고딕"/>
                           <a:cs typeface="맑은 고딕"/>
                         </a:rPr>
-                        <a:t>AI · 생성형AI</a:t>
+                        <a:t>정보시스템 구축</a:t>
                       </a:r>
                     </a:p>
                   </a:txBody>
@@ -19642,7 +19642,7 @@
                           <a:ea typeface="맑은 고딕"/>
                           <a:cs typeface="맑은 고딕"/>
                         </a:rPr>
-                        <a:t>2026.07.24</a:t>
+                        <a:t>2026.06.30</a:t>
                       </a:r>
                     </a:p>
                   </a:txBody>
@@ -19697,7 +19697,7 @@
                           <a:ea typeface="맑은 고딕"/>
                           <a:cs typeface="맑은 고딕"/>
                         </a:rPr>
-                        <a:t>32</a:t>
+                        <a:t>27</a:t>
                       </a:r>
                     </a:p>
                   </a:txBody>
@@ -21397,7 +21397,7 @@
                           <a:ea typeface="맑은 고딕"/>
                           <a:cs typeface="맑은 고딕"/>
                         </a:rPr>
-                        <a:t>SKHy '26년 M15X Ph4 차세대 제조 시스템 _FAB MOS</a:t>
+                        <a:t>SK가스 26년 Trading AI 사업(PP)</a:t>
                       </a:r>
                     </a:p>
                   </a:txBody>
@@ -21452,7 +21452,7 @@
                           <a:ea typeface="맑은 고딕"/>
                           <a:cs typeface="맑은 고딕"/>
                         </a:rPr>
-                        <a:t>2026.03.01 ~ 2026.06.30</a:t>
+                        <a:t>2026.07.01 ~ 2026.07.24</a:t>
                       </a:r>
                     </a:p>
                   </a:txBody>
@@ -21507,7 +21507,7 @@
                           <a:ea typeface="맑은 고딕"/>
                           <a:cs typeface="맑은 고딕"/>
                         </a:rPr>
-                        <a:t>27</a:t>
+                        <a:t>32</a:t>
                       </a:r>
                     </a:p>
                   </a:txBody>
@@ -21696,7 +21696,7 @@
                           <a:ea typeface="맑은 고딕"/>
                           <a:cs typeface="맑은 고딕"/>
                         </a:rPr>
-                        <a:t>SKHy '26년 M14 차세대 제조 시스템 확산_FABMOS</a:t>
+                        <a:t>SKHy '26년 용인 Y1(M17) 제조 DT 시스템 Ph1_FAB MOS</a:t>
                       </a:r>
                     </a:p>
                   </a:txBody>
@@ -21751,7 +21751,7 @@
                           <a:ea typeface="맑은 고딕"/>
                           <a:cs typeface="맑은 고딕"/>
                         </a:rPr>
-                        <a:t>2026.03.16 ~ 2026.06.30</a:t>
+                        <a:t>2026.05.01 ~ 2026.06.30</a:t>
                       </a:r>
                     </a:p>
                   </a:txBody>
@@ -21806,7 +21806,7 @@
                           <a:ea typeface="맑은 고딕"/>
                           <a:cs typeface="맑은 고딕"/>
                         </a:rPr>
-                        <a:t>33</a:t>
+                        <a:t>38</a:t>
                       </a:r>
                     </a:p>
                   </a:txBody>
@@ -22294,7 +22294,7 @@
                           <a:ea typeface="맑은 고딕"/>
                           <a:cs typeface="맑은 고딕"/>
                         </a:rPr>
-                        <a:t>SKHy '26년 용인 Y1(M17) 제조 DT 시스템 Ph1_FAB MOS</a:t>
+                        <a:t>SKHy '26년 M14 차세대 제조 시스템 확산_FABMOS</a:t>
                       </a:r>
                     </a:p>
                   </a:txBody>
@@ -22349,7 +22349,7 @@
                           <a:ea typeface="맑은 고딕"/>
                           <a:cs typeface="맑은 고딕"/>
                         </a:rPr>
-                        <a:t>2026.05.01 ~ 2026.06.30</a:t>
+                        <a:t>2026.03.16 ~ 2026.06.30</a:t>
                       </a:r>
                     </a:p>
                   </a:txBody>
@@ -22404,7 +22404,7 @@
                           <a:ea typeface="맑은 고딕"/>
                           <a:cs typeface="맑은 고딕"/>
                         </a:rPr>
-                        <a:t>38</a:t>
+                        <a:t>33</a:t>
                       </a:r>
                     </a:p>
                   </a:txBody>
@@ -22593,7 +22593,7 @@
                           <a:ea typeface="맑은 고딕"/>
                           <a:cs typeface="맑은 고딕"/>
                         </a:rPr>
-                        <a:t>SK가스 26년 Trading AI 사업(PP)</a:t>
+                        <a:t>SKHy '26년 M15X Ph4 차세대 제조 시스템 _FAB MOS</a:t>
                       </a:r>
                     </a:p>
                   </a:txBody>
@@ -22648,7 +22648,7 @@
                           <a:ea typeface="맑은 고딕"/>
                           <a:cs typeface="맑은 고딕"/>
                         </a:rPr>
-                        <a:t>2026.07.01 ~ 2026.07.24</a:t>
+                        <a:t>2026.03.01 ~ 2026.06.30</a:t>
                       </a:r>
                     </a:p>
                   </a:txBody>
@@ -22703,7 +22703,7 @@
                           <a:ea typeface="맑은 고딕"/>
                           <a:cs typeface="맑은 고딕"/>
                         </a:rPr>
-                        <a:t>32</a:t>
+                        <a:t>27</a:t>
                       </a:r>
                     </a:p>
                   </a:txBody>
@@ -24265,7 +24265,7 @@
                   </a:tcPr>
                 </a:tc>
               </a:tr>
-              <a:tr h="696769">
+              <a:tr h="630000">
                 <a:tc>
                   <a:txBody>
                     <a:bodyPr wrap="square"/>
@@ -24346,7 +24346,7 @@
                           <a:ea typeface="맑은 고딕"/>
                           <a:cs typeface="맑은 고딕"/>
                         </a:rPr>
-                        <a:t>SKHy M15X Ph4 차세대 제조 시스템 FAB MOS</a:t>
+                        <a:t>SK가스 26년 Trading AI 사업(PP)</a:t>
                       </a:r>
                     </a:p>
                   </a:txBody>
@@ -24678,7 +24678,7 @@
                           <a:ea typeface="맑은 고딕"/>
                           <a:cs typeface="맑은 고딕"/>
                         </a:rPr>
-                        <a:t>SKHy M14 차세대 제조 시스템 확산 FABMOS</a:t>
+                        <a:t>SKHy 용인 Y1(M17) 제조 DT 시스템 Ph1 FAB MOS</a:t>
                       </a:r>
                     </a:p>
                   </a:txBody>
@@ -25342,7 +25342,7 @@
                           <a:ea typeface="맑은 고딕"/>
                           <a:cs typeface="맑은 고딕"/>
                         </a:rPr>
-                        <a:t>SKHy 용인 Y1(M17) 제조 DT 시스템 Ph1 FAB MOS</a:t>
+                        <a:t>SKHy M14 차세대 제조 시스템 확산 FABMOS</a:t>
                       </a:r>
                     </a:p>
                   </a:txBody>
@@ -25593,7 +25593,7 @@
                   </a:tcPr>
                 </a:tc>
               </a:tr>
-              <a:tr h="630000">
+              <a:tr h="696769">
                 <a:tc>
                   <a:txBody>
                     <a:bodyPr wrap="square"/>
@@ -25674,7 +25674,7 @@
                           <a:ea typeface="맑은 고딕"/>
                           <a:cs typeface="맑은 고딕"/>
                         </a:rPr>
-                        <a:t>SK가스 26년 Trading AI 사업(PP)</a:t>
+                        <a:t>SKHy M15X Ph4 차세대 제조 시스템 FAB MOS</a:t>
                       </a:r>
                     </a:p>
                   </a:txBody>
@@ -31362,7 +31362,7 @@
                 <a:ea typeface="맑은 고딕"/>
                 <a:cs typeface="맑은 고딕"/>
               </a:rPr>
-              <a:t>실적은 이행완료 시점 기준으로 연도순 기재하고, 현재 수행 중인 사업과 운영 · 유지보수 사업은 기재하지 않습니다. 각 실적의 증빙 첨부 쪽을 비고란에 표시합니다.</a:t>
+              <a:t>실적은 최근 계약일 순(최신 먼저)으로 기재하고, 현재 수행 중인 사업과 운영 · 유지보수 사업은 기재하지 않습니다. 각 실적의 증빙 첨부 쪽을 비고란에 표시합니다.</a:t>
             </a:r>
           </a:p>
         </p:txBody>

--- a/proposals/2026-11_nlrc-ai-labor-commission/nlrc_정량제안서.pptx
+++ b/proposals/2026-11_nlrc-ai-labor-commission/nlrc_정량제안서.pptx
@@ -17777,7 +17777,7 @@
         </p:nvGraphicFramePr>
         <p:xfrm>
           <a:off x="316800" y="2592000"/>
-          <a:ext cx="6260400" cy="4981336"/>
+          <a:ext cx="6260400" cy="5346862"/>
         </p:xfrm>
         <a:graphic>
           <a:graphicData uri="http://schemas.openxmlformats.org/drawingml/2006/table">
@@ -17791,7 +17791,7 @@
                 <a:gridCol w="704295"/>
                 <a:gridCol w="782550"/>
               </a:tblGrid>
-              <a:tr h="522000">
+              <a:tr h="378000">
                 <a:tc>
                   <a:txBody>
                     <a:bodyPr wrap="square"/>
@@ -17809,7 +17809,7 @@
                         </a:spcAft>
                       </a:pPr>
                       <a:r>
-                        <a:rPr sz="1150" b="1">
+                        <a:rPr sz="1050" b="1">
                           <a:solidFill>
                             <a:srgbClr val="FFFFFF"/>
                           </a:solidFill>
@@ -17864,7 +17864,7 @@
                         </a:spcAft>
                       </a:pPr>
                       <a:r>
-                        <a:rPr sz="1150" b="1">
+                        <a:rPr sz="1050" b="1">
                           <a:solidFill>
                             <a:srgbClr val="FFFFFF"/>
                           </a:solidFill>
@@ -17919,7 +17919,7 @@
                         </a:spcAft>
                       </a:pPr>
                       <a:r>
-                        <a:rPr sz="1150" b="1">
+                        <a:rPr sz="1050" b="1">
                           <a:solidFill>
                             <a:srgbClr val="FFFFFF"/>
                           </a:solidFill>
@@ -17974,7 +17974,7 @@
                         </a:spcAft>
                       </a:pPr>
                       <a:r>
-                        <a:rPr sz="1150" b="1">
+                        <a:rPr sz="1050" b="1">
                           <a:solidFill>
                             <a:srgbClr val="FFFFFF"/>
                           </a:solidFill>
@@ -18029,7 +18029,7 @@
                         </a:spcAft>
                       </a:pPr>
                       <a:r>
-                        <a:rPr sz="1150" b="1">
+                        <a:rPr sz="1050" b="1">
                           <a:solidFill>
                             <a:srgbClr val="FFFFFF"/>
                           </a:solidFill>
@@ -18084,7 +18084,7 @@
                         </a:spcAft>
                       </a:pPr>
                       <a:r>
-                        <a:rPr sz="1150" b="1">
+                        <a:rPr sz="1050" b="1">
                           <a:solidFill>
                             <a:srgbClr val="FFFFFF"/>
                           </a:solidFill>
@@ -18123,7 +18123,7 @@
                   </a:tcPr>
                 </a:tc>
               </a:tr>
-              <a:tr h="637048">
+              <a:tr h="413999">
                 <a:tc>
                   <a:txBody>
                     <a:bodyPr wrap="square"/>
@@ -18141,7 +18141,7 @@
                         </a:spcAft>
                       </a:pPr>
                       <a:r>
-                        <a:rPr sz="1100" b="1">
+                        <a:rPr sz="1000" b="1">
                           <a:solidFill>
                             <a:srgbClr val="222222"/>
                           </a:solidFill>
@@ -18196,7 +18196,7 @@
                         </a:spcAft>
                       </a:pPr>
                       <a:r>
-                        <a:rPr sz="1100" b="0">
+                        <a:rPr sz="1000" b="0">
                           <a:solidFill>
                             <a:srgbClr val="222222"/>
                           </a:solidFill>
@@ -18251,7 +18251,7 @@
                         </a:spcAft>
                       </a:pPr>
                       <a:r>
-                        <a:rPr sz="1100" b="0">
+                        <a:rPr sz="1000" b="0">
                           <a:solidFill>
                             <a:srgbClr val="222222"/>
                           </a:solidFill>
@@ -18306,7 +18306,7 @@
                         </a:spcAft>
                       </a:pPr>
                       <a:r>
-                        <a:rPr sz="1100" b="0">
+                        <a:rPr sz="1000" b="0">
                           <a:solidFill>
                             <a:srgbClr val="222222"/>
                           </a:solidFill>
@@ -18361,7 +18361,7 @@
                         </a:spcAft>
                       </a:pPr>
                       <a:r>
-                        <a:rPr sz="1100" b="0">
+                        <a:rPr sz="1000" b="0">
                           <a:solidFill>
                             <a:srgbClr val="222222"/>
                           </a:solidFill>
@@ -18369,7 +18369,7 @@
                           <a:ea typeface="맑은 고딕"/>
                           <a:cs typeface="맑은 고딕"/>
                         </a:rPr>
-                        <a:t>32</a:t>
+                        <a:t>32.325</a:t>
                       </a:r>
                     </a:p>
                   </a:txBody>
@@ -18416,7 +18416,7 @@
                         </a:spcAft>
                       </a:pPr>
                       <a:r>
-                        <a:rPr sz="1100" b="0">
+                        <a:rPr sz="1000" b="0">
                           <a:solidFill>
                             <a:srgbClr val="222222"/>
                           </a:solidFill>
@@ -18455,7 +18455,7 @@
                   </a:tcPr>
                 </a:tc>
               </a:tr>
-              <a:tr h="637048">
+              <a:tr h="517608">
                 <a:tc>
                   <a:txBody>
                     <a:bodyPr wrap="square"/>
@@ -18473,7 +18473,7 @@
                         </a:spcAft>
                       </a:pPr>
                       <a:r>
-                        <a:rPr sz="1100" b="1">
+                        <a:rPr sz="1000" b="1">
                           <a:solidFill>
                             <a:srgbClr val="222222"/>
                           </a:solidFill>
@@ -18528,7 +18528,7 @@
                         </a:spcAft>
                       </a:pPr>
                       <a:r>
-                        <a:rPr sz="1100" b="0">
+                        <a:rPr sz="1000" b="0">
                           <a:solidFill>
                             <a:srgbClr val="222222"/>
                           </a:solidFill>
@@ -18583,7 +18583,7 @@
                         </a:spcAft>
                       </a:pPr>
                       <a:r>
-                        <a:rPr sz="1100" b="0">
+                        <a:rPr sz="1000" b="0">
                           <a:solidFill>
                             <a:srgbClr val="222222"/>
                           </a:solidFill>
@@ -18638,7 +18638,7 @@
                         </a:spcAft>
                       </a:pPr>
                       <a:r>
-                        <a:rPr sz="1100" b="0">
+                        <a:rPr sz="1000" b="0">
                           <a:solidFill>
                             <a:srgbClr val="222222"/>
                           </a:solidFill>
@@ -18693,7 +18693,7 @@
                         </a:spcAft>
                       </a:pPr>
                       <a:r>
-                        <a:rPr sz="1100" b="0">
+                        <a:rPr sz="1000" b="0">
                           <a:solidFill>
                             <a:srgbClr val="222222"/>
                           </a:solidFill>
@@ -18701,7 +18701,7 @@
                           <a:ea typeface="맑은 고딕"/>
                           <a:cs typeface="맑은 고딕"/>
                         </a:rPr>
-                        <a:t>38</a:t>
+                        <a:t>38.007</a:t>
                       </a:r>
                     </a:p>
                   </a:txBody>
@@ -18748,7 +18748,7 @@
                         </a:spcAft>
                       </a:pPr>
                       <a:r>
-                        <a:rPr sz="1100" b="0">
+                        <a:rPr sz="1000" b="0">
                           <a:solidFill>
                             <a:srgbClr val="222222"/>
                           </a:solidFill>
@@ -18787,7 +18787,7 @@
                   </a:tcPr>
                 </a:tc>
               </a:tr>
-              <a:tr h="637048">
+              <a:tr h="413999">
                 <a:tc>
                   <a:txBody>
                     <a:bodyPr wrap="square"/>
@@ -18805,7 +18805,7 @@
                         </a:spcAft>
                       </a:pPr>
                       <a:r>
-                        <a:rPr sz="1100" b="1">
+                        <a:rPr sz="1000" b="1">
                           <a:solidFill>
                             <a:srgbClr val="222222"/>
                           </a:solidFill>
@@ -18860,7 +18860,7 @@
                         </a:spcAft>
                       </a:pPr>
                       <a:r>
-                        <a:rPr sz="1100" b="0">
+                        <a:rPr sz="1000" b="0">
                           <a:solidFill>
                             <a:srgbClr val="222222"/>
                           </a:solidFill>
@@ -18915,7 +18915,7 @@
                         </a:spcAft>
                       </a:pPr>
                       <a:r>
-                        <a:rPr sz="1100" b="0">
+                        <a:rPr sz="1000" b="0">
                           <a:solidFill>
                             <a:srgbClr val="222222"/>
                           </a:solidFill>
@@ -18970,7 +18970,7 @@
                         </a:spcAft>
                       </a:pPr>
                       <a:r>
-                        <a:rPr sz="1100" b="0">
+                        <a:rPr sz="1000" b="0">
                           <a:solidFill>
                             <a:srgbClr val="222222"/>
                           </a:solidFill>
@@ -19025,7 +19025,7 @@
                         </a:spcAft>
                       </a:pPr>
                       <a:r>
-                        <a:rPr sz="1100" b="0">
+                        <a:rPr sz="1000" b="0">
                           <a:solidFill>
                             <a:srgbClr val="222222"/>
                           </a:solidFill>
@@ -19033,7 +19033,7 @@
                           <a:ea typeface="맑은 고딕"/>
                           <a:cs typeface="맑은 고딕"/>
                         </a:rPr>
-                        <a:t>129</a:t>
+                        <a:t>129.385</a:t>
                       </a:r>
                     </a:p>
                   </a:txBody>
@@ -19080,7 +19080,7 @@
                         </a:spcAft>
                       </a:pPr>
                       <a:r>
-                        <a:rPr sz="1100" b="0">
+                        <a:rPr sz="1000" b="0">
                           <a:solidFill>
                             <a:srgbClr val="222222"/>
                           </a:solidFill>
@@ -19119,7 +19119,7 @@
                   </a:tcPr>
                 </a:tc>
               </a:tr>
-              <a:tr h="637048">
+              <a:tr h="517608">
                 <a:tc>
                   <a:txBody>
                     <a:bodyPr wrap="square"/>
@@ -19137,7 +19137,7 @@
                         </a:spcAft>
                       </a:pPr>
                       <a:r>
-                        <a:rPr sz="1100" b="1">
+                        <a:rPr sz="1000" b="1">
                           <a:solidFill>
                             <a:srgbClr val="222222"/>
                           </a:solidFill>
@@ -19192,7 +19192,7 @@
                         </a:spcAft>
                       </a:pPr>
                       <a:r>
-                        <a:rPr sz="1100" b="0">
+                        <a:rPr sz="1000" b="0">
                           <a:solidFill>
                             <a:srgbClr val="222222"/>
                           </a:solidFill>
@@ -19247,7 +19247,7 @@
                         </a:spcAft>
                       </a:pPr>
                       <a:r>
-                        <a:rPr sz="1100" b="0">
+                        <a:rPr sz="1000" b="0">
                           <a:solidFill>
                             <a:srgbClr val="222222"/>
                           </a:solidFill>
@@ -19302,7 +19302,7 @@
                         </a:spcAft>
                       </a:pPr>
                       <a:r>
-                        <a:rPr sz="1100" b="0">
+                        <a:rPr sz="1000" b="0">
                           <a:solidFill>
                             <a:srgbClr val="222222"/>
                           </a:solidFill>
@@ -19357,7 +19357,7 @@
                         </a:spcAft>
                       </a:pPr>
                       <a:r>
-                        <a:rPr sz="1100" b="0">
+                        <a:rPr sz="1000" b="0">
                           <a:solidFill>
                             <a:srgbClr val="222222"/>
                           </a:solidFill>
@@ -19365,7 +19365,7 @@
                           <a:ea typeface="맑은 고딕"/>
                           <a:cs typeface="맑은 고딕"/>
                         </a:rPr>
-                        <a:t>33</a:t>
+                        <a:t>32.853</a:t>
                       </a:r>
                     </a:p>
                   </a:txBody>
@@ -19412,7 +19412,7 @@
                         </a:spcAft>
                       </a:pPr>
                       <a:r>
-                        <a:rPr sz="1100" b="0">
+                        <a:rPr sz="1000" b="0">
                           <a:solidFill>
                             <a:srgbClr val="222222"/>
                           </a:solidFill>
@@ -19451,7 +19451,7 @@
                   </a:tcPr>
                 </a:tc>
               </a:tr>
-              <a:tr h="637048">
+              <a:tr h="517608">
                 <a:tc>
                   <a:txBody>
                     <a:bodyPr wrap="square"/>
@@ -19469,7 +19469,7 @@
                         </a:spcAft>
                       </a:pPr>
                       <a:r>
-                        <a:rPr sz="1100" b="1">
+                        <a:rPr sz="1000" b="1">
                           <a:solidFill>
                             <a:srgbClr val="222222"/>
                           </a:solidFill>
@@ -19524,7 +19524,7 @@
                         </a:spcAft>
                       </a:pPr>
                       <a:r>
-                        <a:rPr sz="1100" b="0">
+                        <a:rPr sz="1000" b="0">
                           <a:solidFill>
                             <a:srgbClr val="222222"/>
                           </a:solidFill>
@@ -19579,7 +19579,7 @@
                         </a:spcAft>
                       </a:pPr>
                       <a:r>
-                        <a:rPr sz="1100" b="0">
+                        <a:rPr sz="1000" b="0">
                           <a:solidFill>
                             <a:srgbClr val="222222"/>
                           </a:solidFill>
@@ -19634,7 +19634,7 @@
                         </a:spcAft>
                       </a:pPr>
                       <a:r>
-                        <a:rPr sz="1100" b="0">
+                        <a:rPr sz="1000" b="0">
                           <a:solidFill>
                             <a:srgbClr val="222222"/>
                           </a:solidFill>
@@ -19689,7 +19689,7 @@
                         </a:spcAft>
                       </a:pPr>
                       <a:r>
-                        <a:rPr sz="1100" b="0">
+                        <a:rPr sz="1000" b="0">
                           <a:solidFill>
                             <a:srgbClr val="222222"/>
                           </a:solidFill>
@@ -19697,7 +19697,7 @@
                           <a:ea typeface="맑은 고딕"/>
                           <a:cs typeface="맑은 고딕"/>
                         </a:rPr>
-                        <a:t>27</a:t>
+                        <a:t>27.440</a:t>
                       </a:r>
                     </a:p>
                   </a:txBody>
@@ -19744,7 +19744,7 @@
                         </a:spcAft>
                       </a:pPr>
                       <a:r>
-                        <a:rPr sz="1100" b="0">
+                        <a:rPr sz="1000" b="0">
                           <a:solidFill>
                             <a:srgbClr val="222222"/>
                           </a:solidFill>
@@ -19783,7 +19783,7 @@
                   </a:tcPr>
                 </a:tc>
               </a:tr>
-              <a:tr h="637048">
+              <a:tr h="517608">
                 <a:tc>
                   <a:txBody>
                     <a:bodyPr wrap="square"/>
@@ -19801,7 +19801,7 @@
                         </a:spcAft>
                       </a:pPr>
                       <a:r>
-                        <a:rPr sz="1100" b="1">
+                        <a:rPr sz="1000" b="1">
                           <a:solidFill>
                             <a:srgbClr val="222222"/>
                           </a:solidFill>
@@ -19856,15 +19856,15 @@
                         </a:spcAft>
                       </a:pPr>
                       <a:r>
-                        <a:rPr sz="1100" b="1">
-                          <a:solidFill>
-                            <a:srgbClr val="E00000"/>
+                        <a:rPr sz="1000" b="0">
+                          <a:solidFill>
+                            <a:srgbClr val="222222"/>
                           </a:solidFill>
                           <a:latin typeface="맑은 고딕"/>
                           <a:ea typeface="맑은 고딕"/>
                           <a:cs typeface="맑은 고딕"/>
                         </a:rPr>
-                        <a:t>【최근 3년 완료 정보시스템 구축 · 개발 실적 — 실적 대장 확인】</a:t>
+                        <a:t>SKHy '26년 표준 아키텍처 구축 Ph3 원가선투입</a:t>
                       </a:r>
                     </a:p>
                   </a:txBody>
@@ -19911,15 +19911,15 @@
                         </a:spcAft>
                       </a:pPr>
                       <a:r>
-                        <a:rPr sz="1100" b="1">
-                          <a:solidFill>
-                            <a:srgbClr val="E00000"/>
+                        <a:rPr sz="1000" b="0">
+                          <a:solidFill>
+                            <a:srgbClr val="222222"/>
                           </a:solidFill>
                           <a:latin typeface="맑은 고딕"/>
                           <a:ea typeface="맑은 고딕"/>
                           <a:cs typeface="맑은 고딕"/>
                         </a:rPr>
-                        <a:t>【분야】</a:t>
+                        <a:t>정보시스템 구축</a:t>
                       </a:r>
                     </a:p>
                   </a:txBody>
@@ -19966,15 +19966,15 @@
                         </a:spcAft>
                       </a:pPr>
                       <a:r>
-                        <a:rPr sz="1100" b="1">
-                          <a:solidFill>
-                            <a:srgbClr val="E00000"/>
+                        <a:rPr sz="1000" b="0">
+                          <a:solidFill>
+                            <a:srgbClr val="222222"/>
                           </a:solidFill>
                           <a:latin typeface="맑은 고딕"/>
                           <a:ea typeface="맑은 고딕"/>
                           <a:cs typeface="맑은 고딕"/>
                         </a:rPr>
-                        <a:t>【완료일】</a:t>
+                        <a:t>2026.06.30</a:t>
                       </a:r>
                     </a:p>
                   </a:txBody>
@@ -20021,15 +20021,15 @@
                         </a:spcAft>
                       </a:pPr>
                       <a:r>
-                        <a:rPr sz="1100" b="1">
-                          <a:solidFill>
-                            <a:srgbClr val="E00000"/>
+                        <a:rPr sz="1000" b="0">
+                          <a:solidFill>
+                            <a:srgbClr val="222222"/>
                           </a:solidFill>
                           <a:latin typeface="맑은 고딕"/>
                           <a:ea typeface="맑은 고딕"/>
                           <a:cs typeface="맑은 고딕"/>
                         </a:rPr>
-                        <a:t>【금액】</a:t>
+                        <a:t>1,170.490</a:t>
                       </a:r>
                     </a:p>
                   </a:txBody>
@@ -20076,15 +20076,15 @@
                         </a:spcAft>
                       </a:pPr>
                       <a:r>
-                        <a:rPr sz="1100" b="1">
-                          <a:solidFill>
-                            <a:srgbClr val="E00000"/>
+                        <a:rPr sz="1000" b="0">
+                          <a:solidFill>
+                            <a:srgbClr val="222222"/>
                           </a:solidFill>
                           <a:latin typeface="맑은 고딕"/>
                           <a:ea typeface="맑은 고딕"/>
                           <a:cs typeface="맑은 고딕"/>
                         </a:rPr>
-                        <a:t>【발주처】</a:t>
+                        <a:t>에스케이㈜</a:t>
                       </a:r>
                     </a:p>
                   </a:txBody>
@@ -20115,7 +20115,7 @@
                   </a:tcPr>
                 </a:tc>
               </a:tr>
-              <a:tr h="637048">
+              <a:tr h="517608">
                 <a:tc>
                   <a:txBody>
                     <a:bodyPr wrap="square"/>
@@ -20132,6 +20132,17 @@
                           <a:spcPts val="0"/>
                         </a:spcAft>
                       </a:pPr>
+                      <a:r>
+                        <a:rPr sz="1000" b="1">
+                          <a:solidFill>
+                            <a:srgbClr val="222222"/>
+                          </a:solidFill>
+                          <a:latin typeface="맑은 고딕"/>
+                          <a:ea typeface="맑은 고딕"/>
+                          <a:cs typeface="맑은 고딕"/>
+                        </a:rPr>
+                        <a:t>7</a:t>
+                      </a:r>
                     </a:p>
                   </a:txBody>
                   <a:tcPr marL="36000" marR="36000" marT="18000" marB="18000" anchor="ctr">
@@ -20177,7 +20188,7 @@
                         </a:spcAft>
                       </a:pPr>
                       <a:r>
-                        <a:rPr sz="1100" b="0">
+                        <a:rPr sz="1000" b="0">
                           <a:solidFill>
                             <a:srgbClr val="222222"/>
                           </a:solidFill>
@@ -20185,7 +20196,7 @@
                           <a:ea typeface="맑은 고딕"/>
                           <a:cs typeface="맑은 고딕"/>
                         </a:rPr>
-                        <a:t>합계</a:t>
+                        <a:t>SKHy '25년 표준 아키텍처 구축 Ph2 (차세대)(DT)</a:t>
                       </a:r>
                     </a:p>
                   </a:txBody>
@@ -20231,6 +20242,17 @@
                           <a:spcPts val="0"/>
                         </a:spcAft>
                       </a:pPr>
+                      <a:r>
+                        <a:rPr sz="1000" b="0">
+                          <a:solidFill>
+                            <a:srgbClr val="222222"/>
+                          </a:solidFill>
+                          <a:latin typeface="맑은 고딕"/>
+                          <a:ea typeface="맑은 고딕"/>
+                          <a:cs typeface="맑은 고딕"/>
+                        </a:rPr>
+                        <a:t>정보시스템 구축</a:t>
+                      </a:r>
                     </a:p>
                   </a:txBody>
                   <a:tcPr marL="36000" marR="36000" marT="18000" marB="18000" anchor="ctr">
@@ -20275,6 +20297,17 @@
                           <a:spcPts val="0"/>
                         </a:spcAft>
                       </a:pPr>
+                      <a:r>
+                        <a:rPr sz="1000" b="0">
+                          <a:solidFill>
+                            <a:srgbClr val="222222"/>
+                          </a:solidFill>
+                          <a:latin typeface="맑은 고딕"/>
+                          <a:ea typeface="맑은 고딕"/>
+                          <a:cs typeface="맑은 고딕"/>
+                        </a:rPr>
+                        <a:t>2025.12.31</a:t>
+                      </a:r>
                     </a:p>
                   </a:txBody>
                   <a:tcPr marL="36000" marR="36000" marT="18000" marB="18000" anchor="ctr">
@@ -20320,15 +20353,15 @@
                         </a:spcAft>
                       </a:pPr>
                       <a:r>
-                        <a:rPr sz="1100" b="1">
-                          <a:solidFill>
-                            <a:srgbClr val="E00000"/>
+                        <a:rPr sz="1000" b="0">
+                          <a:solidFill>
+                            <a:srgbClr val="222222"/>
                           </a:solidFill>
                           <a:latin typeface="맑은 고딕"/>
                           <a:ea typeface="맑은 고딕"/>
                           <a:cs typeface="맑은 고딕"/>
                         </a:rPr>
-                        <a:t>【260 + 추가분】</a:t>
+                        <a:t>1,999.758</a:t>
                       </a:r>
                     </a:p>
                   </a:txBody>
@@ -20374,6 +20407,980 @@
                           <a:spcPts val="0"/>
                         </a:spcAft>
                       </a:pPr>
+                      <a:r>
+                        <a:rPr sz="1000" b="0">
+                          <a:solidFill>
+                            <a:srgbClr val="222222"/>
+                          </a:solidFill>
+                          <a:latin typeface="맑은 고딕"/>
+                          <a:ea typeface="맑은 고딕"/>
+                          <a:cs typeface="맑은 고딕"/>
+                        </a:rPr>
+                        <a:t>에스케이㈜</a:t>
+                      </a:r>
+                    </a:p>
+                  </a:txBody>
+                  <a:tcPr marL="36000" marR="36000" marT="18000" marB="18000" anchor="ctr">
+                    <a:lnL w="10160">
+                      <a:solidFill>
+                        <a:srgbClr val="C8D3E0"/>
+                      </a:solidFill>
+                    </a:lnL>
+                    <a:lnR w="10160">
+                      <a:solidFill>
+                        <a:srgbClr val="C8D3E0"/>
+                      </a:solidFill>
+                    </a:lnR>
+                    <a:lnT w="10160">
+                      <a:solidFill>
+                        <a:srgbClr val="C8D3E0"/>
+                      </a:solidFill>
+                    </a:lnT>
+                    <a:lnB w="10160">
+                      <a:solidFill>
+                        <a:srgbClr val="C8D3E0"/>
+                      </a:solidFill>
+                    </a:lnB>
+                    <a:solidFill>
+                      <a:srgbClr val="FFFFFF"/>
+                    </a:solidFill>
+                  </a:tcPr>
+                </a:tc>
+              </a:tr>
+              <a:tr h="517608">
+                <a:tc>
+                  <a:txBody>
+                    <a:bodyPr wrap="square"/>
+                    <a:lstStyle/>
+                    <a:p>
+                      <a:pPr algn="ctr">
+                        <a:lnSpc>
+                          <a:spcPct val="115000"/>
+                        </a:lnSpc>
+                        <a:spcBef>
+                          <a:spcPts val="0"/>
+                        </a:spcBef>
+                        <a:spcAft>
+                          <a:spcPts val="0"/>
+                        </a:spcAft>
+                      </a:pPr>
+                      <a:r>
+                        <a:rPr sz="1000" b="1">
+                          <a:solidFill>
+                            <a:srgbClr val="222222"/>
+                          </a:solidFill>
+                          <a:latin typeface="맑은 고딕"/>
+                          <a:ea typeface="맑은 고딕"/>
+                          <a:cs typeface="맑은 고딕"/>
+                        </a:rPr>
+                        <a:t>8</a:t>
+                      </a:r>
+                    </a:p>
+                  </a:txBody>
+                  <a:tcPr marL="36000" marR="36000" marT="18000" marB="18000" anchor="ctr">
+                    <a:lnL w="10160">
+                      <a:solidFill>
+                        <a:srgbClr val="C8D3E0"/>
+                      </a:solidFill>
+                    </a:lnL>
+                    <a:lnR w="10160">
+                      <a:solidFill>
+                        <a:srgbClr val="C8D3E0"/>
+                      </a:solidFill>
+                    </a:lnR>
+                    <a:lnT w="10160">
+                      <a:solidFill>
+                        <a:srgbClr val="C8D3E0"/>
+                      </a:solidFill>
+                    </a:lnT>
+                    <a:lnB w="10160">
+                      <a:solidFill>
+                        <a:srgbClr val="C8D3E0"/>
+                      </a:solidFill>
+                    </a:lnB>
+                    <a:solidFill>
+                      <a:srgbClr val="EEF3F9"/>
+                    </a:solidFill>
+                  </a:tcPr>
+                </a:tc>
+                <a:tc>
+                  <a:txBody>
+                    <a:bodyPr wrap="square"/>
+                    <a:lstStyle/>
+                    <a:p>
+                      <a:pPr algn="ctr">
+                        <a:lnSpc>
+                          <a:spcPct val="115000"/>
+                        </a:lnSpc>
+                        <a:spcBef>
+                          <a:spcPts val="0"/>
+                        </a:spcBef>
+                        <a:spcAft>
+                          <a:spcPts val="0"/>
+                        </a:spcAft>
+                      </a:pPr>
+                      <a:r>
+                        <a:rPr sz="1000" b="0">
+                          <a:solidFill>
+                            <a:srgbClr val="222222"/>
+                          </a:solidFill>
+                          <a:latin typeface="맑은 고딕"/>
+                          <a:ea typeface="맑은 고딕"/>
+                          <a:cs typeface="맑은 고딕"/>
+                        </a:rPr>
+                        <a:t>SKHy 25년 차세대 표준 아키텍처 구축 Ph1</a:t>
+                      </a:r>
+                    </a:p>
+                  </a:txBody>
+                  <a:tcPr marL="36000" marR="36000" marT="18000" marB="18000" anchor="ctr">
+                    <a:lnL w="10160">
+                      <a:solidFill>
+                        <a:srgbClr val="C8D3E0"/>
+                      </a:solidFill>
+                    </a:lnL>
+                    <a:lnR w="10160">
+                      <a:solidFill>
+                        <a:srgbClr val="C8D3E0"/>
+                      </a:solidFill>
+                    </a:lnR>
+                    <a:lnT w="10160">
+                      <a:solidFill>
+                        <a:srgbClr val="C8D3E0"/>
+                      </a:solidFill>
+                    </a:lnT>
+                    <a:lnB w="10160">
+                      <a:solidFill>
+                        <a:srgbClr val="C8D3E0"/>
+                      </a:solidFill>
+                    </a:lnB>
+                    <a:solidFill>
+                      <a:srgbClr val="FFFFFF"/>
+                    </a:solidFill>
+                  </a:tcPr>
+                </a:tc>
+                <a:tc>
+                  <a:txBody>
+                    <a:bodyPr wrap="square"/>
+                    <a:lstStyle/>
+                    <a:p>
+                      <a:pPr algn="ctr">
+                        <a:lnSpc>
+                          <a:spcPct val="115000"/>
+                        </a:lnSpc>
+                        <a:spcBef>
+                          <a:spcPts val="0"/>
+                        </a:spcBef>
+                        <a:spcAft>
+                          <a:spcPts val="0"/>
+                        </a:spcAft>
+                      </a:pPr>
+                      <a:r>
+                        <a:rPr sz="1000" b="0">
+                          <a:solidFill>
+                            <a:srgbClr val="222222"/>
+                          </a:solidFill>
+                          <a:latin typeface="맑은 고딕"/>
+                          <a:ea typeface="맑은 고딕"/>
+                          <a:cs typeface="맑은 고딕"/>
+                        </a:rPr>
+                        <a:t>정보시스템 구축</a:t>
+                      </a:r>
+                    </a:p>
+                  </a:txBody>
+                  <a:tcPr marL="36000" marR="36000" marT="18000" marB="18000" anchor="ctr">
+                    <a:lnL w="10160">
+                      <a:solidFill>
+                        <a:srgbClr val="C8D3E0"/>
+                      </a:solidFill>
+                    </a:lnL>
+                    <a:lnR w="10160">
+                      <a:solidFill>
+                        <a:srgbClr val="C8D3E0"/>
+                      </a:solidFill>
+                    </a:lnR>
+                    <a:lnT w="10160">
+                      <a:solidFill>
+                        <a:srgbClr val="C8D3E0"/>
+                      </a:solidFill>
+                    </a:lnT>
+                    <a:lnB w="10160">
+                      <a:solidFill>
+                        <a:srgbClr val="C8D3E0"/>
+                      </a:solidFill>
+                    </a:lnB>
+                    <a:solidFill>
+                      <a:srgbClr val="FFFFFF"/>
+                    </a:solidFill>
+                  </a:tcPr>
+                </a:tc>
+                <a:tc>
+                  <a:txBody>
+                    <a:bodyPr wrap="square"/>
+                    <a:lstStyle/>
+                    <a:p>
+                      <a:pPr algn="ctr">
+                        <a:lnSpc>
+                          <a:spcPct val="115000"/>
+                        </a:lnSpc>
+                        <a:spcBef>
+                          <a:spcPts val="0"/>
+                        </a:spcBef>
+                        <a:spcAft>
+                          <a:spcPts val="0"/>
+                        </a:spcAft>
+                      </a:pPr>
+                      <a:r>
+                        <a:rPr sz="1000" b="0">
+                          <a:solidFill>
+                            <a:srgbClr val="222222"/>
+                          </a:solidFill>
+                          <a:latin typeface="맑은 고딕"/>
+                          <a:ea typeface="맑은 고딕"/>
+                          <a:cs typeface="맑은 고딕"/>
+                        </a:rPr>
+                        <a:t>2025.01.31</a:t>
+                      </a:r>
+                    </a:p>
+                  </a:txBody>
+                  <a:tcPr marL="36000" marR="36000" marT="18000" marB="18000" anchor="ctr">
+                    <a:lnL w="10160">
+                      <a:solidFill>
+                        <a:srgbClr val="C8D3E0"/>
+                      </a:solidFill>
+                    </a:lnL>
+                    <a:lnR w="10160">
+                      <a:solidFill>
+                        <a:srgbClr val="C8D3E0"/>
+                      </a:solidFill>
+                    </a:lnR>
+                    <a:lnT w="10160">
+                      <a:solidFill>
+                        <a:srgbClr val="C8D3E0"/>
+                      </a:solidFill>
+                    </a:lnT>
+                    <a:lnB w="10160">
+                      <a:solidFill>
+                        <a:srgbClr val="C8D3E0"/>
+                      </a:solidFill>
+                    </a:lnB>
+                    <a:solidFill>
+                      <a:srgbClr val="FFFFFF"/>
+                    </a:solidFill>
+                  </a:tcPr>
+                </a:tc>
+                <a:tc>
+                  <a:txBody>
+                    <a:bodyPr wrap="square"/>
+                    <a:lstStyle/>
+                    <a:p>
+                      <a:pPr algn="ctr">
+                        <a:lnSpc>
+                          <a:spcPct val="115000"/>
+                        </a:lnSpc>
+                        <a:spcBef>
+                          <a:spcPts val="0"/>
+                        </a:spcBef>
+                        <a:spcAft>
+                          <a:spcPts val="0"/>
+                        </a:spcAft>
+                      </a:pPr>
+                      <a:r>
+                        <a:rPr sz="1000" b="0">
+                          <a:solidFill>
+                            <a:srgbClr val="222222"/>
+                          </a:solidFill>
+                          <a:latin typeface="맑은 고딕"/>
+                          <a:ea typeface="맑은 고딕"/>
+                          <a:cs typeface="맑은 고딕"/>
+                        </a:rPr>
+                        <a:t>220.104</a:t>
+                      </a:r>
+                    </a:p>
+                  </a:txBody>
+                  <a:tcPr marL="36000" marR="36000" marT="18000" marB="18000" anchor="ctr">
+                    <a:lnL w="10160">
+                      <a:solidFill>
+                        <a:srgbClr val="C8D3E0"/>
+                      </a:solidFill>
+                    </a:lnL>
+                    <a:lnR w="10160">
+                      <a:solidFill>
+                        <a:srgbClr val="C8D3E0"/>
+                      </a:solidFill>
+                    </a:lnR>
+                    <a:lnT w="10160">
+                      <a:solidFill>
+                        <a:srgbClr val="C8D3E0"/>
+                      </a:solidFill>
+                    </a:lnT>
+                    <a:lnB w="10160">
+                      <a:solidFill>
+                        <a:srgbClr val="C8D3E0"/>
+                      </a:solidFill>
+                    </a:lnB>
+                    <a:solidFill>
+                      <a:srgbClr val="FFFFFF"/>
+                    </a:solidFill>
+                  </a:tcPr>
+                </a:tc>
+                <a:tc>
+                  <a:txBody>
+                    <a:bodyPr wrap="square"/>
+                    <a:lstStyle/>
+                    <a:p>
+                      <a:pPr algn="l">
+                        <a:lnSpc>
+                          <a:spcPct val="115000"/>
+                        </a:lnSpc>
+                        <a:spcBef>
+                          <a:spcPts val="0"/>
+                        </a:spcBef>
+                        <a:spcAft>
+                          <a:spcPts val="0"/>
+                        </a:spcAft>
+                      </a:pPr>
+                      <a:r>
+                        <a:rPr sz="1000" b="0">
+                          <a:solidFill>
+                            <a:srgbClr val="222222"/>
+                          </a:solidFill>
+                          <a:latin typeface="맑은 고딕"/>
+                          <a:ea typeface="맑은 고딕"/>
+                          <a:cs typeface="맑은 고딕"/>
+                        </a:rPr>
+                        <a:t>에스케이㈜</a:t>
+                      </a:r>
+                    </a:p>
+                  </a:txBody>
+                  <a:tcPr marL="36000" marR="36000" marT="18000" marB="18000" anchor="ctr">
+                    <a:lnL w="10160">
+                      <a:solidFill>
+                        <a:srgbClr val="C8D3E0"/>
+                      </a:solidFill>
+                    </a:lnL>
+                    <a:lnR w="10160">
+                      <a:solidFill>
+                        <a:srgbClr val="C8D3E0"/>
+                      </a:solidFill>
+                    </a:lnR>
+                    <a:lnT w="10160">
+                      <a:solidFill>
+                        <a:srgbClr val="C8D3E0"/>
+                      </a:solidFill>
+                    </a:lnT>
+                    <a:lnB w="10160">
+                      <a:solidFill>
+                        <a:srgbClr val="C8D3E0"/>
+                      </a:solidFill>
+                    </a:lnB>
+                    <a:solidFill>
+                      <a:srgbClr val="FFFFFF"/>
+                    </a:solidFill>
+                  </a:tcPr>
+                </a:tc>
+              </a:tr>
+              <a:tr h="517608">
+                <a:tc>
+                  <a:txBody>
+                    <a:bodyPr wrap="square"/>
+                    <a:lstStyle/>
+                    <a:p>
+                      <a:pPr algn="ctr">
+                        <a:lnSpc>
+                          <a:spcPct val="115000"/>
+                        </a:lnSpc>
+                        <a:spcBef>
+                          <a:spcPts val="0"/>
+                        </a:spcBef>
+                        <a:spcAft>
+                          <a:spcPts val="0"/>
+                        </a:spcAft>
+                      </a:pPr>
+                      <a:r>
+                        <a:rPr sz="1000" b="1">
+                          <a:solidFill>
+                            <a:srgbClr val="222222"/>
+                          </a:solidFill>
+                          <a:latin typeface="맑은 고딕"/>
+                          <a:ea typeface="맑은 고딕"/>
+                          <a:cs typeface="맑은 고딕"/>
+                        </a:rPr>
+                        <a:t>9</a:t>
+                      </a:r>
+                    </a:p>
+                  </a:txBody>
+                  <a:tcPr marL="36000" marR="36000" marT="18000" marB="18000" anchor="ctr">
+                    <a:lnL w="10160">
+                      <a:solidFill>
+                        <a:srgbClr val="C8D3E0"/>
+                      </a:solidFill>
+                    </a:lnL>
+                    <a:lnR w="10160">
+                      <a:solidFill>
+                        <a:srgbClr val="C8D3E0"/>
+                      </a:solidFill>
+                    </a:lnR>
+                    <a:lnT w="10160">
+                      <a:solidFill>
+                        <a:srgbClr val="C8D3E0"/>
+                      </a:solidFill>
+                    </a:lnT>
+                    <a:lnB w="10160">
+                      <a:solidFill>
+                        <a:srgbClr val="C8D3E0"/>
+                      </a:solidFill>
+                    </a:lnB>
+                    <a:solidFill>
+                      <a:srgbClr val="EEF3F9"/>
+                    </a:solidFill>
+                  </a:tcPr>
+                </a:tc>
+                <a:tc>
+                  <a:txBody>
+                    <a:bodyPr wrap="square"/>
+                    <a:lstStyle/>
+                    <a:p>
+                      <a:pPr algn="ctr">
+                        <a:lnSpc>
+                          <a:spcPct val="115000"/>
+                        </a:lnSpc>
+                        <a:spcBef>
+                          <a:spcPts val="0"/>
+                        </a:spcBef>
+                        <a:spcAft>
+                          <a:spcPts val="0"/>
+                        </a:spcAft>
+                      </a:pPr>
+                      <a:r>
+                        <a:rPr sz="1000" b="0">
+                          <a:solidFill>
+                            <a:srgbClr val="222222"/>
+                          </a:solidFill>
+                          <a:latin typeface="맑은 고딕"/>
+                          <a:ea typeface="맑은 고딕"/>
+                          <a:cs typeface="맑은 고딕"/>
+                        </a:rPr>
+                        <a:t>CELLO SQUARE 통합운영플랫폼 구축</a:t>
+                      </a:r>
+                    </a:p>
+                  </a:txBody>
+                  <a:tcPr marL="36000" marR="36000" marT="18000" marB="18000" anchor="ctr">
+                    <a:lnL w="10160">
+                      <a:solidFill>
+                        <a:srgbClr val="C8D3E0"/>
+                      </a:solidFill>
+                    </a:lnL>
+                    <a:lnR w="10160">
+                      <a:solidFill>
+                        <a:srgbClr val="C8D3E0"/>
+                      </a:solidFill>
+                    </a:lnR>
+                    <a:lnT w="10160">
+                      <a:solidFill>
+                        <a:srgbClr val="C8D3E0"/>
+                      </a:solidFill>
+                    </a:lnT>
+                    <a:lnB w="10160">
+                      <a:solidFill>
+                        <a:srgbClr val="C8D3E0"/>
+                      </a:solidFill>
+                    </a:lnB>
+                    <a:solidFill>
+                      <a:srgbClr val="FFFFFF"/>
+                    </a:solidFill>
+                  </a:tcPr>
+                </a:tc>
+                <a:tc>
+                  <a:txBody>
+                    <a:bodyPr wrap="square"/>
+                    <a:lstStyle/>
+                    <a:p>
+                      <a:pPr algn="ctr">
+                        <a:lnSpc>
+                          <a:spcPct val="115000"/>
+                        </a:lnSpc>
+                        <a:spcBef>
+                          <a:spcPts val="0"/>
+                        </a:spcBef>
+                        <a:spcAft>
+                          <a:spcPts val="0"/>
+                        </a:spcAft>
+                      </a:pPr>
+                      <a:r>
+                        <a:rPr sz="1000" b="0">
+                          <a:solidFill>
+                            <a:srgbClr val="222222"/>
+                          </a:solidFill>
+                          <a:latin typeface="맑은 고딕"/>
+                          <a:ea typeface="맑은 고딕"/>
+                          <a:cs typeface="맑은 고딕"/>
+                        </a:rPr>
+                        <a:t>정보시스템 구축</a:t>
+                      </a:r>
+                    </a:p>
+                  </a:txBody>
+                  <a:tcPr marL="36000" marR="36000" marT="18000" marB="18000" anchor="ctr">
+                    <a:lnL w="10160">
+                      <a:solidFill>
+                        <a:srgbClr val="C8D3E0"/>
+                      </a:solidFill>
+                    </a:lnL>
+                    <a:lnR w="10160">
+                      <a:solidFill>
+                        <a:srgbClr val="C8D3E0"/>
+                      </a:solidFill>
+                    </a:lnR>
+                    <a:lnT w="10160">
+                      <a:solidFill>
+                        <a:srgbClr val="C8D3E0"/>
+                      </a:solidFill>
+                    </a:lnT>
+                    <a:lnB w="10160">
+                      <a:solidFill>
+                        <a:srgbClr val="C8D3E0"/>
+                      </a:solidFill>
+                    </a:lnB>
+                    <a:solidFill>
+                      <a:srgbClr val="FFFFFF"/>
+                    </a:solidFill>
+                  </a:tcPr>
+                </a:tc>
+                <a:tc>
+                  <a:txBody>
+                    <a:bodyPr wrap="square"/>
+                    <a:lstStyle/>
+                    <a:p>
+                      <a:pPr algn="ctr">
+                        <a:lnSpc>
+                          <a:spcPct val="115000"/>
+                        </a:lnSpc>
+                        <a:spcBef>
+                          <a:spcPts val="0"/>
+                        </a:spcBef>
+                        <a:spcAft>
+                          <a:spcPts val="0"/>
+                        </a:spcAft>
+                      </a:pPr>
+                      <a:r>
+                        <a:rPr sz="1000" b="0">
+                          <a:solidFill>
+                            <a:srgbClr val="222222"/>
+                          </a:solidFill>
+                          <a:latin typeface="맑은 고딕"/>
+                          <a:ea typeface="맑은 고딕"/>
+                          <a:cs typeface="맑은 고딕"/>
+                        </a:rPr>
+                        <a:t>2024.12.31</a:t>
+                      </a:r>
+                    </a:p>
+                  </a:txBody>
+                  <a:tcPr marL="36000" marR="36000" marT="18000" marB="18000" anchor="ctr">
+                    <a:lnL w="10160">
+                      <a:solidFill>
+                        <a:srgbClr val="C8D3E0"/>
+                      </a:solidFill>
+                    </a:lnL>
+                    <a:lnR w="10160">
+                      <a:solidFill>
+                        <a:srgbClr val="C8D3E0"/>
+                      </a:solidFill>
+                    </a:lnR>
+                    <a:lnT w="10160">
+                      <a:solidFill>
+                        <a:srgbClr val="C8D3E0"/>
+                      </a:solidFill>
+                    </a:lnT>
+                    <a:lnB w="10160">
+                      <a:solidFill>
+                        <a:srgbClr val="C8D3E0"/>
+                      </a:solidFill>
+                    </a:lnB>
+                    <a:solidFill>
+                      <a:srgbClr val="FFFFFF"/>
+                    </a:solidFill>
+                  </a:tcPr>
+                </a:tc>
+                <a:tc>
+                  <a:txBody>
+                    <a:bodyPr wrap="square"/>
+                    <a:lstStyle/>
+                    <a:p>
+                      <a:pPr algn="ctr">
+                        <a:lnSpc>
+                          <a:spcPct val="115000"/>
+                        </a:lnSpc>
+                        <a:spcBef>
+                          <a:spcPts val="0"/>
+                        </a:spcBef>
+                        <a:spcAft>
+                          <a:spcPts val="0"/>
+                        </a:spcAft>
+                      </a:pPr>
+                      <a:r>
+                        <a:rPr sz="1000" b="0">
+                          <a:solidFill>
+                            <a:srgbClr val="222222"/>
+                          </a:solidFill>
+                          <a:latin typeface="맑은 고딕"/>
+                          <a:ea typeface="맑은 고딕"/>
+                          <a:cs typeface="맑은 고딕"/>
+                        </a:rPr>
+                        <a:t>1,444.700</a:t>
+                      </a:r>
+                    </a:p>
+                  </a:txBody>
+                  <a:tcPr marL="36000" marR="36000" marT="18000" marB="18000" anchor="ctr">
+                    <a:lnL w="10160">
+                      <a:solidFill>
+                        <a:srgbClr val="C8D3E0"/>
+                      </a:solidFill>
+                    </a:lnL>
+                    <a:lnR w="10160">
+                      <a:solidFill>
+                        <a:srgbClr val="C8D3E0"/>
+                      </a:solidFill>
+                    </a:lnR>
+                    <a:lnT w="10160">
+                      <a:solidFill>
+                        <a:srgbClr val="C8D3E0"/>
+                      </a:solidFill>
+                    </a:lnT>
+                    <a:lnB w="10160">
+                      <a:solidFill>
+                        <a:srgbClr val="C8D3E0"/>
+                      </a:solidFill>
+                    </a:lnB>
+                    <a:solidFill>
+                      <a:srgbClr val="FFFFFF"/>
+                    </a:solidFill>
+                  </a:tcPr>
+                </a:tc>
+                <a:tc>
+                  <a:txBody>
+                    <a:bodyPr wrap="square"/>
+                    <a:lstStyle/>
+                    <a:p>
+                      <a:pPr algn="l">
+                        <a:lnSpc>
+                          <a:spcPct val="115000"/>
+                        </a:lnSpc>
+                        <a:spcBef>
+                          <a:spcPts val="0"/>
+                        </a:spcBef>
+                        <a:spcAft>
+                          <a:spcPts val="0"/>
+                        </a:spcAft>
+                      </a:pPr>
+                      <a:r>
+                        <a:rPr sz="1000" b="0">
+                          <a:solidFill>
+                            <a:srgbClr val="222222"/>
+                          </a:solidFill>
+                          <a:latin typeface="맑은 고딕"/>
+                          <a:ea typeface="맑은 고딕"/>
+                          <a:cs typeface="맑은 고딕"/>
+                        </a:rPr>
+                        <a:t>삼성에스디에스㈜</a:t>
+                      </a:r>
+                    </a:p>
+                  </a:txBody>
+                  <a:tcPr marL="36000" marR="36000" marT="18000" marB="18000" anchor="ctr">
+                    <a:lnL w="10160">
+                      <a:solidFill>
+                        <a:srgbClr val="C8D3E0"/>
+                      </a:solidFill>
+                    </a:lnL>
+                    <a:lnR w="10160">
+                      <a:solidFill>
+                        <a:srgbClr val="C8D3E0"/>
+                      </a:solidFill>
+                    </a:lnR>
+                    <a:lnT w="10160">
+                      <a:solidFill>
+                        <a:srgbClr val="C8D3E0"/>
+                      </a:solidFill>
+                    </a:lnT>
+                    <a:lnB w="10160">
+                      <a:solidFill>
+                        <a:srgbClr val="C8D3E0"/>
+                      </a:solidFill>
+                    </a:lnB>
+                    <a:solidFill>
+                      <a:srgbClr val="FFFFFF"/>
+                    </a:solidFill>
+                  </a:tcPr>
+                </a:tc>
+              </a:tr>
+              <a:tr h="517608">
+                <a:tc>
+                  <a:txBody>
+                    <a:bodyPr wrap="square"/>
+                    <a:lstStyle/>
+                    <a:p>
+                      <a:pPr algn="ctr">
+                        <a:lnSpc>
+                          <a:spcPct val="115000"/>
+                        </a:lnSpc>
+                        <a:spcBef>
+                          <a:spcPts val="0"/>
+                        </a:spcBef>
+                        <a:spcAft>
+                          <a:spcPts val="0"/>
+                        </a:spcAft>
+                      </a:pPr>
+                    </a:p>
+                  </a:txBody>
+                  <a:tcPr marL="36000" marR="36000" marT="18000" marB="18000" anchor="ctr">
+                    <a:lnL w="10160">
+                      <a:solidFill>
+                        <a:srgbClr val="C8D3E0"/>
+                      </a:solidFill>
+                    </a:lnL>
+                    <a:lnR w="10160">
+                      <a:solidFill>
+                        <a:srgbClr val="C8D3E0"/>
+                      </a:solidFill>
+                    </a:lnR>
+                    <a:lnT w="10160">
+                      <a:solidFill>
+                        <a:srgbClr val="C8D3E0"/>
+                      </a:solidFill>
+                    </a:lnT>
+                    <a:lnB w="10160">
+                      <a:solidFill>
+                        <a:srgbClr val="C8D3E0"/>
+                      </a:solidFill>
+                    </a:lnB>
+                    <a:solidFill>
+                      <a:srgbClr val="EEF3F9"/>
+                    </a:solidFill>
+                  </a:tcPr>
+                </a:tc>
+                <a:tc>
+                  <a:txBody>
+                    <a:bodyPr wrap="square"/>
+                    <a:lstStyle/>
+                    <a:p>
+                      <a:pPr algn="ctr">
+                        <a:lnSpc>
+                          <a:spcPct val="115000"/>
+                        </a:lnSpc>
+                        <a:spcBef>
+                          <a:spcPts val="0"/>
+                        </a:spcBef>
+                        <a:spcAft>
+                          <a:spcPts val="0"/>
+                        </a:spcAft>
+                      </a:pPr>
+                      <a:r>
+                        <a:rPr sz="1000" b="0">
+                          <a:solidFill>
+                            <a:srgbClr val="222222"/>
+                          </a:solidFill>
+                          <a:latin typeface="맑은 고딕"/>
+                          <a:ea typeface="맑은 고딕"/>
+                          <a:cs typeface="맑은 고딕"/>
+                        </a:rPr>
+                        <a:t>합계 (9건)</a:t>
+                      </a:r>
+                    </a:p>
+                  </a:txBody>
+                  <a:tcPr marL="36000" marR="36000" marT="18000" marB="18000" anchor="ctr">
+                    <a:lnL w="10160">
+                      <a:solidFill>
+                        <a:srgbClr val="C8D3E0"/>
+                      </a:solidFill>
+                    </a:lnL>
+                    <a:lnR w="10160">
+                      <a:solidFill>
+                        <a:srgbClr val="C8D3E0"/>
+                      </a:solidFill>
+                    </a:lnR>
+                    <a:lnT w="10160">
+                      <a:solidFill>
+                        <a:srgbClr val="C8D3E0"/>
+                      </a:solidFill>
+                    </a:lnT>
+                    <a:lnB w="10160">
+                      <a:solidFill>
+                        <a:srgbClr val="C8D3E0"/>
+                      </a:solidFill>
+                    </a:lnB>
+                    <a:solidFill>
+                      <a:srgbClr val="FFFFFF"/>
+                    </a:solidFill>
+                  </a:tcPr>
+                </a:tc>
+                <a:tc>
+                  <a:txBody>
+                    <a:bodyPr wrap="square"/>
+                    <a:lstStyle/>
+                    <a:p>
+                      <a:pPr algn="ctr">
+                        <a:lnSpc>
+                          <a:spcPct val="115000"/>
+                        </a:lnSpc>
+                        <a:spcBef>
+                          <a:spcPts val="0"/>
+                        </a:spcBef>
+                        <a:spcAft>
+                          <a:spcPts val="0"/>
+                        </a:spcAft>
+                      </a:pPr>
+                    </a:p>
+                  </a:txBody>
+                  <a:tcPr marL="36000" marR="36000" marT="18000" marB="18000" anchor="ctr">
+                    <a:lnL w="10160">
+                      <a:solidFill>
+                        <a:srgbClr val="C8D3E0"/>
+                      </a:solidFill>
+                    </a:lnL>
+                    <a:lnR w="10160">
+                      <a:solidFill>
+                        <a:srgbClr val="C8D3E0"/>
+                      </a:solidFill>
+                    </a:lnR>
+                    <a:lnT w="10160">
+                      <a:solidFill>
+                        <a:srgbClr val="C8D3E0"/>
+                      </a:solidFill>
+                    </a:lnT>
+                    <a:lnB w="10160">
+                      <a:solidFill>
+                        <a:srgbClr val="C8D3E0"/>
+                      </a:solidFill>
+                    </a:lnB>
+                    <a:solidFill>
+                      <a:srgbClr val="FFFFFF"/>
+                    </a:solidFill>
+                  </a:tcPr>
+                </a:tc>
+                <a:tc>
+                  <a:txBody>
+                    <a:bodyPr wrap="square"/>
+                    <a:lstStyle/>
+                    <a:p>
+                      <a:pPr algn="ctr">
+                        <a:lnSpc>
+                          <a:spcPct val="115000"/>
+                        </a:lnSpc>
+                        <a:spcBef>
+                          <a:spcPts val="0"/>
+                        </a:spcBef>
+                        <a:spcAft>
+                          <a:spcPts val="0"/>
+                        </a:spcAft>
+                      </a:pPr>
+                    </a:p>
+                  </a:txBody>
+                  <a:tcPr marL="36000" marR="36000" marT="18000" marB="18000" anchor="ctr">
+                    <a:lnL w="10160">
+                      <a:solidFill>
+                        <a:srgbClr val="C8D3E0"/>
+                      </a:solidFill>
+                    </a:lnL>
+                    <a:lnR w="10160">
+                      <a:solidFill>
+                        <a:srgbClr val="C8D3E0"/>
+                      </a:solidFill>
+                    </a:lnR>
+                    <a:lnT w="10160">
+                      <a:solidFill>
+                        <a:srgbClr val="C8D3E0"/>
+                      </a:solidFill>
+                    </a:lnT>
+                    <a:lnB w="10160">
+                      <a:solidFill>
+                        <a:srgbClr val="C8D3E0"/>
+                      </a:solidFill>
+                    </a:lnB>
+                    <a:solidFill>
+                      <a:srgbClr val="FFFFFF"/>
+                    </a:solidFill>
+                  </a:tcPr>
+                </a:tc>
+                <a:tc>
+                  <a:txBody>
+                    <a:bodyPr wrap="square"/>
+                    <a:lstStyle/>
+                    <a:p>
+                      <a:pPr algn="ctr">
+                        <a:lnSpc>
+                          <a:spcPct val="115000"/>
+                        </a:lnSpc>
+                        <a:spcBef>
+                          <a:spcPts val="0"/>
+                        </a:spcBef>
+                        <a:spcAft>
+                          <a:spcPts val="0"/>
+                        </a:spcAft>
+                      </a:pPr>
+                      <a:r>
+                        <a:rPr sz="1000" b="0">
+                          <a:solidFill>
+                            <a:srgbClr val="222222"/>
+                          </a:solidFill>
+                          <a:latin typeface="맑은 고딕"/>
+                          <a:ea typeface="맑은 고딕"/>
+                          <a:cs typeface="맑은 고딕"/>
+                        </a:rPr>
+                        <a:t>5,095.062</a:t>
+                      </a:r>
+                    </a:p>
+                  </a:txBody>
+                  <a:tcPr marL="36000" marR="36000" marT="18000" marB="18000" anchor="ctr">
+                    <a:lnL w="10160">
+                      <a:solidFill>
+                        <a:srgbClr val="C8D3E0"/>
+                      </a:solidFill>
+                    </a:lnL>
+                    <a:lnR w="10160">
+                      <a:solidFill>
+                        <a:srgbClr val="C8D3E0"/>
+                      </a:solidFill>
+                    </a:lnR>
+                    <a:lnT w="10160">
+                      <a:solidFill>
+                        <a:srgbClr val="C8D3E0"/>
+                      </a:solidFill>
+                    </a:lnT>
+                    <a:lnB w="10160">
+                      <a:solidFill>
+                        <a:srgbClr val="C8D3E0"/>
+                      </a:solidFill>
+                    </a:lnB>
+                    <a:solidFill>
+                      <a:srgbClr val="FFFFFF"/>
+                    </a:solidFill>
+                  </a:tcPr>
+                </a:tc>
+                <a:tc>
+                  <a:txBody>
+                    <a:bodyPr wrap="square"/>
+                    <a:lstStyle/>
+                    <a:p>
+                      <a:pPr algn="l">
+                        <a:lnSpc>
+                          <a:spcPct val="115000"/>
+                        </a:lnSpc>
+                        <a:spcBef>
+                          <a:spcPts val="0"/>
+                        </a:spcBef>
+                        <a:spcAft>
+                          <a:spcPts val="0"/>
+                        </a:spcAft>
+                      </a:pPr>
+                      <a:r>
+                        <a:rPr sz="1000" b="0">
+                          <a:solidFill>
+                            <a:srgbClr val="222222"/>
+                          </a:solidFill>
+                          <a:latin typeface="맑은 고딕"/>
+                          <a:ea typeface="맑은 고딕"/>
+                          <a:cs typeface="맑은 고딕"/>
+                        </a:rPr>
+                        <a:t>사업규모 대비 449%</a:t>
+                      </a:r>
                     </a:p>
                   </a:txBody>
                   <a:tcPr marL="36000" marR="36000" marT="18000" marB="18000" anchor="ctr">
@@ -20415,7 +21422,7 @@
         </p:nvSpPr>
         <p:spPr>
           <a:xfrm>
-            <a:off x="280800" y="7645341"/>
+            <a:off x="280800" y="8010863"/>
             <a:ext cx="6332400" cy="180000"/>
           </a:xfrm>
           <a:prstGeom prst="rect">
@@ -20473,8 +21480,8 @@
         </p:nvSpPr>
         <p:spPr>
           <a:xfrm>
-            <a:off x="280800" y="7861341"/>
-            <a:ext cx="6332400" cy="772583"/>
+            <a:off x="280800" y="8226864"/>
+            <a:ext cx="6332400" cy="738271"/>
           </a:xfrm>
           <a:prstGeom prst="rect">
             <a:avLst/>
@@ -20517,7 +21524,7 @@
         </p:nvSpPr>
         <p:spPr>
           <a:xfrm>
-            <a:off x="406799" y="7915341"/>
+            <a:off x="406799" y="8280863"/>
             <a:ext cx="6080400" cy="198000"/>
           </a:xfrm>
           <a:prstGeom prst="rect">
@@ -20553,8 +21560,8 @@
         </p:nvSpPr>
         <p:spPr>
           <a:xfrm>
-            <a:off x="406799" y="8113341"/>
-            <a:ext cx="6080400" cy="466583"/>
+            <a:off x="406799" y="8478864"/>
+            <a:ext cx="6080400" cy="432271"/>
           </a:xfrm>
           <a:prstGeom prst="rect">
             <a:avLst/>
@@ -20579,7 +21586,7 @@
               </a:spcAft>
             </a:pPr>
             <a:r>
-              <a:rPr sz="1150" b="0">
+              <a:rPr sz="1050" b="0">
                 <a:solidFill>
                   <a:srgbClr val="FFFFFF"/>
                 </a:solidFill>
@@ -20986,7 +21993,7 @@
                 <a:ea typeface="맑은 고딕" panose="00000800000000000000" pitchFamily="2" charset="-127"/>
                 <a:cs typeface="맑은 고딕" panose="00000800000000000000" pitchFamily="2" charset="-127"/>
               </a:rPr>
-              <a:t>(연도순 · 이행완료 기준) RFP [별지 4호] 서식에 따라 </a:t>
+              <a:t>(최근 계약일 순 · 이행완료 기준) RFP [별지 4호] 서식에 따라 </a:t>
             </a:r>
             <a:r>
               <a:rPr lang="ko-KR" altLang="en-US" sz="1200" b="1">
@@ -21081,7 +22088,7 @@
         </p:nvGraphicFramePr>
         <p:xfrm>
           <a:off x="316800" y="2592000"/>
-          <a:ext cx="6260400" cy="3814848"/>
+          <a:ext cx="6260400" cy="4278303"/>
         </p:xfrm>
         <a:graphic>
           <a:graphicData uri="http://schemas.openxmlformats.org/drawingml/2006/table">
@@ -21094,7 +22101,7 @@
                 <a:gridCol w="782550"/>
                 <a:gridCol w="1017315"/>
               </a:tblGrid>
-              <a:tr h="450000">
+              <a:tr h="306000">
                 <a:tc>
                   <a:txBody>
                     <a:bodyPr wrap="square"/>
@@ -21112,7 +22119,7 @@
                         </a:spcAft>
                       </a:pPr>
                       <a:r>
-                        <a:rPr sz="1050" b="1">
+                        <a:rPr sz="950" b="1">
                           <a:solidFill>
                             <a:srgbClr val="FFFFFF"/>
                           </a:solidFill>
@@ -21167,7 +22174,7 @@
                         </a:spcAft>
                       </a:pPr>
                       <a:r>
-                        <a:rPr sz="1050" b="1">
+                        <a:rPr sz="950" b="1">
                           <a:solidFill>
                             <a:srgbClr val="FFFFFF"/>
                           </a:solidFill>
@@ -21222,7 +22229,7 @@
                         </a:spcAft>
                       </a:pPr>
                       <a:r>
-                        <a:rPr sz="1050" b="1">
+                        <a:rPr sz="950" b="1">
                           <a:solidFill>
                             <a:srgbClr val="FFFFFF"/>
                           </a:solidFill>
@@ -21277,7 +22284,7 @@
                         </a:spcAft>
                       </a:pPr>
                       <a:r>
-                        <a:rPr sz="1050" b="1">
+                        <a:rPr sz="950" b="1">
                           <a:solidFill>
                             <a:srgbClr val="FFFFFF"/>
                           </a:solidFill>
@@ -21332,7 +22339,7 @@
                         </a:spcAft>
                       </a:pPr>
                       <a:r>
-                        <a:rPr sz="1050" b="1">
+                        <a:rPr sz="950" b="1">
                           <a:solidFill>
                             <a:srgbClr val="FFFFFF"/>
                           </a:solidFill>
@@ -21371,7 +22378,7 @@
                   </a:tcPr>
                 </a:tc>
               </a:tr>
-              <a:tr h="560808">
+              <a:tr h="441367">
                 <a:tc>
                   <a:txBody>
                     <a:bodyPr wrap="square"/>
@@ -21389,7 +22396,7 @@
                         </a:spcAft>
                       </a:pPr>
                       <a:r>
-                        <a:rPr sz="1000" b="1">
+                        <a:rPr sz="900" b="1">
                           <a:solidFill>
                             <a:srgbClr val="222222"/>
                           </a:solidFill>
@@ -21444,7 +22451,7 @@
                         </a:spcAft>
                       </a:pPr>
                       <a:r>
-                        <a:rPr sz="1000" b="0">
+                        <a:rPr sz="900" b="0">
                           <a:solidFill>
                             <a:srgbClr val="222222"/>
                           </a:solidFill>
@@ -21499,7 +22506,7 @@
                         </a:spcAft>
                       </a:pPr>
                       <a:r>
-                        <a:rPr sz="1000" b="0">
+                        <a:rPr sz="900" b="0">
                           <a:solidFill>
                             <a:srgbClr val="222222"/>
                           </a:solidFill>
@@ -21507,7 +22514,7 @@
                           <a:ea typeface="맑은 고딕"/>
                           <a:cs typeface="맑은 고딕"/>
                         </a:rPr>
-                        <a:t>32</a:t>
+                        <a:t>32.325</a:t>
                       </a:r>
                     </a:p>
                   </a:txBody>
@@ -21554,7 +22561,7 @@
                         </a:spcAft>
                       </a:pPr>
                       <a:r>
-                        <a:rPr sz="1000" b="0">
+                        <a:rPr sz="900" b="0">
                           <a:solidFill>
                             <a:srgbClr val="222222"/>
                           </a:solidFill>
@@ -21609,7 +22616,7 @@
                         </a:spcAft>
                       </a:pPr>
                       <a:r>
-                        <a:rPr sz="1000" b="1">
+                        <a:rPr sz="900" b="1">
                           <a:solidFill>
                             <a:srgbClr val="E00000"/>
                           </a:solidFill>
@@ -21620,7 +22627,7 @@
                         <a:t>【방법론】</a:t>
                       </a:r>
                       <a:r>
-                        <a:rPr sz="1000" b="0">
+                        <a:rPr sz="900" b="0">
                           <a:solidFill>
                             <a:srgbClr val="222222"/>
                           </a:solidFill>
@@ -21631,7 +22638,7 @@
                         <a:t> / </a:t>
                       </a:r>
                       <a:r>
-                        <a:rPr sz="1000" b="1">
+                        <a:rPr sz="900" b="1">
                           <a:solidFill>
                             <a:srgbClr val="E00000"/>
                           </a:solidFill>
@@ -21670,7 +22677,7 @@
                   </a:tcPr>
                 </a:tc>
               </a:tr>
-              <a:tr h="560808">
+              <a:tr h="441367">
                 <a:tc>
                   <a:txBody>
                     <a:bodyPr wrap="square"/>
@@ -21688,7 +22695,7 @@
                         </a:spcAft>
                       </a:pPr>
                       <a:r>
-                        <a:rPr sz="1000" b="1">
+                        <a:rPr sz="900" b="1">
                           <a:solidFill>
                             <a:srgbClr val="222222"/>
                           </a:solidFill>
@@ -21743,7 +22750,7 @@
                         </a:spcAft>
                       </a:pPr>
                       <a:r>
-                        <a:rPr sz="1000" b="0">
+                        <a:rPr sz="900" b="0">
                           <a:solidFill>
                             <a:srgbClr val="222222"/>
                           </a:solidFill>
@@ -21798,7 +22805,7 @@
                         </a:spcAft>
                       </a:pPr>
                       <a:r>
-                        <a:rPr sz="1000" b="0">
+                        <a:rPr sz="900" b="0">
                           <a:solidFill>
                             <a:srgbClr val="222222"/>
                           </a:solidFill>
@@ -21806,7 +22813,7 @@
                           <a:ea typeface="맑은 고딕"/>
                           <a:cs typeface="맑은 고딕"/>
                         </a:rPr>
-                        <a:t>38</a:t>
+                        <a:t>38.007</a:t>
                       </a:r>
                     </a:p>
                   </a:txBody>
@@ -21853,7 +22860,7 @@
                         </a:spcAft>
                       </a:pPr>
                       <a:r>
-                        <a:rPr sz="1000" b="0">
+                        <a:rPr sz="900" b="0">
                           <a:solidFill>
                             <a:srgbClr val="222222"/>
                           </a:solidFill>
@@ -21908,7 +22915,7 @@
                         </a:spcAft>
                       </a:pPr>
                       <a:r>
-                        <a:rPr sz="1000" b="1">
+                        <a:rPr sz="900" b="1">
                           <a:solidFill>
                             <a:srgbClr val="E00000"/>
                           </a:solidFill>
@@ -21919,7 +22926,7 @@
                         <a:t>【방법론】</a:t>
                       </a:r>
                       <a:r>
-                        <a:rPr sz="1000" b="0">
+                        <a:rPr sz="900" b="0">
                           <a:solidFill>
                             <a:srgbClr val="222222"/>
                           </a:solidFill>
@@ -21930,7 +22937,7 @@
                         <a:t> / </a:t>
                       </a:r>
                       <a:r>
-                        <a:rPr sz="1000" b="1">
+                        <a:rPr sz="900" b="1">
                           <a:solidFill>
                             <a:srgbClr val="E00000"/>
                           </a:solidFill>
@@ -21969,7 +22976,7 @@
                   </a:tcPr>
                 </a:tc>
               </a:tr>
-              <a:tr h="560808">
+              <a:tr h="441367">
                 <a:tc>
                   <a:txBody>
                     <a:bodyPr wrap="square"/>
@@ -21987,7 +22994,7 @@
                         </a:spcAft>
                       </a:pPr>
                       <a:r>
-                        <a:rPr sz="1000" b="1">
+                        <a:rPr sz="900" b="1">
                           <a:solidFill>
                             <a:srgbClr val="222222"/>
                           </a:solidFill>
@@ -22042,7 +23049,7 @@
                         </a:spcAft>
                       </a:pPr>
                       <a:r>
-                        <a:rPr sz="1000" b="0">
+                        <a:rPr sz="900" b="0">
                           <a:solidFill>
                             <a:srgbClr val="222222"/>
                           </a:solidFill>
@@ -22097,7 +23104,7 @@
                         </a:spcAft>
                       </a:pPr>
                       <a:r>
-                        <a:rPr sz="1000" b="0">
+                        <a:rPr sz="900" b="0">
                           <a:solidFill>
                             <a:srgbClr val="222222"/>
                           </a:solidFill>
@@ -22105,7 +23112,7 @@
                           <a:ea typeface="맑은 고딕"/>
                           <a:cs typeface="맑은 고딕"/>
                         </a:rPr>
-                        <a:t>129</a:t>
+                        <a:t>129.385</a:t>
                       </a:r>
                     </a:p>
                   </a:txBody>
@@ -22152,7 +23159,7 @@
                         </a:spcAft>
                       </a:pPr>
                       <a:r>
-                        <a:rPr sz="1000" b="0">
+                        <a:rPr sz="900" b="0">
                           <a:solidFill>
                             <a:srgbClr val="222222"/>
                           </a:solidFill>
@@ -22207,7 +23214,7 @@
                         </a:spcAft>
                       </a:pPr>
                       <a:r>
-                        <a:rPr sz="1000" b="1">
+                        <a:rPr sz="900" b="1">
                           <a:solidFill>
                             <a:srgbClr val="E00000"/>
                           </a:solidFill>
@@ -22218,7 +23225,7 @@
                         <a:t>【방법론】</a:t>
                       </a:r>
                       <a:r>
-                        <a:rPr sz="1000" b="0">
+                        <a:rPr sz="900" b="0">
                           <a:solidFill>
                             <a:srgbClr val="222222"/>
                           </a:solidFill>
@@ -22229,7 +23236,7 @@
                         <a:t> / </a:t>
                       </a:r>
                       <a:r>
-                        <a:rPr sz="1000" b="1">
+                        <a:rPr sz="900" b="1">
                           <a:solidFill>
                             <a:srgbClr val="E00000"/>
                           </a:solidFill>
@@ -22268,7 +23275,7 @@
                   </a:tcPr>
                 </a:tc>
               </a:tr>
-              <a:tr h="560808">
+              <a:tr h="441367">
                 <a:tc>
                   <a:txBody>
                     <a:bodyPr wrap="square"/>
@@ -22286,7 +23293,7 @@
                         </a:spcAft>
                       </a:pPr>
                       <a:r>
-                        <a:rPr sz="1000" b="1">
+                        <a:rPr sz="900" b="1">
                           <a:solidFill>
                             <a:srgbClr val="222222"/>
                           </a:solidFill>
@@ -22341,7 +23348,7 @@
                         </a:spcAft>
                       </a:pPr>
                       <a:r>
-                        <a:rPr sz="1000" b="0">
+                        <a:rPr sz="900" b="0">
                           <a:solidFill>
                             <a:srgbClr val="222222"/>
                           </a:solidFill>
@@ -22396,7 +23403,7 @@
                         </a:spcAft>
                       </a:pPr>
                       <a:r>
-                        <a:rPr sz="1000" b="0">
+                        <a:rPr sz="900" b="0">
                           <a:solidFill>
                             <a:srgbClr val="222222"/>
                           </a:solidFill>
@@ -22404,7 +23411,7 @@
                           <a:ea typeface="맑은 고딕"/>
                           <a:cs typeface="맑은 고딕"/>
                         </a:rPr>
-                        <a:t>33</a:t>
+                        <a:t>32.853</a:t>
                       </a:r>
                     </a:p>
                   </a:txBody>
@@ -22451,7 +23458,7 @@
                         </a:spcAft>
                       </a:pPr>
                       <a:r>
-                        <a:rPr sz="1000" b="0">
+                        <a:rPr sz="900" b="0">
                           <a:solidFill>
                             <a:srgbClr val="222222"/>
                           </a:solidFill>
@@ -22506,7 +23513,7 @@
                         </a:spcAft>
                       </a:pPr>
                       <a:r>
-                        <a:rPr sz="1000" b="1">
+                        <a:rPr sz="900" b="1">
                           <a:solidFill>
                             <a:srgbClr val="E00000"/>
                           </a:solidFill>
@@ -22517,7 +23524,7 @@
                         <a:t>【방법론】</a:t>
                       </a:r>
                       <a:r>
-                        <a:rPr sz="1000" b="0">
+                        <a:rPr sz="900" b="0">
                           <a:solidFill>
                             <a:srgbClr val="222222"/>
                           </a:solidFill>
@@ -22528,7 +23535,7 @@
                         <a:t> / </a:t>
                       </a:r>
                       <a:r>
-                        <a:rPr sz="1000" b="1">
+                        <a:rPr sz="900" b="1">
                           <a:solidFill>
                             <a:srgbClr val="E00000"/>
                           </a:solidFill>
@@ -22567,7 +23574,7 @@
                   </a:tcPr>
                 </a:tc>
               </a:tr>
-              <a:tr h="560808">
+              <a:tr h="441367">
                 <a:tc>
                   <a:txBody>
                     <a:bodyPr wrap="square"/>
@@ -22585,7 +23592,7 @@
                         </a:spcAft>
                       </a:pPr>
                       <a:r>
-                        <a:rPr sz="1000" b="1">
+                        <a:rPr sz="900" b="1">
                           <a:solidFill>
                             <a:srgbClr val="222222"/>
                           </a:solidFill>
@@ -22640,7 +23647,7 @@
                         </a:spcAft>
                       </a:pPr>
                       <a:r>
-                        <a:rPr sz="1000" b="0">
+                        <a:rPr sz="900" b="0">
                           <a:solidFill>
                             <a:srgbClr val="222222"/>
                           </a:solidFill>
@@ -22695,7 +23702,7 @@
                         </a:spcAft>
                       </a:pPr>
                       <a:r>
-                        <a:rPr sz="1000" b="0">
+                        <a:rPr sz="900" b="0">
                           <a:solidFill>
                             <a:srgbClr val="222222"/>
                           </a:solidFill>
@@ -22703,7 +23710,7 @@
                           <a:ea typeface="맑은 고딕"/>
                           <a:cs typeface="맑은 고딕"/>
                         </a:rPr>
-                        <a:t>27</a:t>
+                        <a:t>27.440</a:t>
                       </a:r>
                     </a:p>
                   </a:txBody>
@@ -22750,7 +23757,7 @@
                         </a:spcAft>
                       </a:pPr>
                       <a:r>
-                        <a:rPr sz="1000" b="0">
+                        <a:rPr sz="900" b="0">
                           <a:solidFill>
                             <a:srgbClr val="222222"/>
                           </a:solidFill>
@@ -22805,7 +23812,7 @@
                         </a:spcAft>
                       </a:pPr>
                       <a:r>
-                        <a:rPr sz="1000" b="1">
+                        <a:rPr sz="900" b="1">
                           <a:solidFill>
                             <a:srgbClr val="E00000"/>
                           </a:solidFill>
@@ -22816,7 +23823,7 @@
                         <a:t>【방법론】</a:t>
                       </a:r>
                       <a:r>
-                        <a:rPr sz="1000" b="0">
+                        <a:rPr sz="900" b="0">
                           <a:solidFill>
                             <a:srgbClr val="222222"/>
                           </a:solidFill>
@@ -22827,7 +23834,7 @@
                         <a:t> / </a:t>
                       </a:r>
                       <a:r>
-                        <a:rPr sz="1000" b="1">
+                        <a:rPr sz="900" b="1">
                           <a:solidFill>
                             <a:srgbClr val="E00000"/>
                           </a:solidFill>
@@ -22866,7 +23873,7 @@
                   </a:tcPr>
                 </a:tc>
               </a:tr>
-              <a:tr h="560808">
+              <a:tr h="441367">
                 <a:tc>
                   <a:txBody>
                     <a:bodyPr wrap="square"/>
@@ -22884,15 +23891,15 @@
                         </a:spcAft>
                       </a:pPr>
                       <a:r>
-                        <a:rPr sz="1000" b="1">
-                          <a:solidFill>
-                            <a:srgbClr val="E00000"/>
+                        <a:rPr sz="900" b="1">
+                          <a:solidFill>
+                            <a:srgbClr val="222222"/>
                           </a:solidFill>
                           <a:latin typeface="맑은 고딕"/>
                           <a:ea typeface="맑은 고딕"/>
                           <a:cs typeface="맑은 고딕"/>
                         </a:rPr>
-                        <a:t>【추가 구축 · 개발 실적】</a:t>
+                        <a:t>SKHy '26년 표준 아키텍처 구축 Ph3 원가선투입</a:t>
                       </a:r>
                     </a:p>
                   </a:txBody>
@@ -22939,15 +23946,15 @@
                         </a:spcAft>
                       </a:pPr>
                       <a:r>
-                        <a:rPr sz="1000" b="1">
-                          <a:solidFill>
-                            <a:srgbClr val="E00000"/>
+                        <a:rPr sz="900" b="0">
+                          <a:solidFill>
+                            <a:srgbClr val="222222"/>
                           </a:solidFill>
                           <a:latin typeface="맑은 고딕"/>
                           <a:ea typeface="맑은 고딕"/>
                           <a:cs typeface="맑은 고딕"/>
                         </a:rPr>
-                        <a:t>【기간】</a:t>
+                        <a:t>2026.01.19 ~ 2026.06.30</a:t>
                       </a:r>
                     </a:p>
                   </a:txBody>
@@ -22994,15 +24001,15 @@
                         </a:spcAft>
                       </a:pPr>
                       <a:r>
-                        <a:rPr sz="1000" b="1">
-                          <a:solidFill>
-                            <a:srgbClr val="E00000"/>
+                        <a:rPr sz="900" b="0">
+                          <a:solidFill>
+                            <a:srgbClr val="222222"/>
                           </a:solidFill>
                           <a:latin typeface="맑은 고딕"/>
                           <a:ea typeface="맑은 고딕"/>
                           <a:cs typeface="맑은 고딕"/>
                         </a:rPr>
-                        <a:t>【금액】</a:t>
+                        <a:t>1,170.490</a:t>
                       </a:r>
                     </a:p>
                   </a:txBody>
@@ -23049,15 +24056,15 @@
                         </a:spcAft>
                       </a:pPr>
                       <a:r>
-                        <a:rPr sz="1000" b="1">
-                          <a:solidFill>
-                            <a:srgbClr val="E00000"/>
+                        <a:rPr sz="900" b="0">
+                          <a:solidFill>
+                            <a:srgbClr val="222222"/>
                           </a:solidFill>
                           <a:latin typeface="맑은 고딕"/>
                           <a:ea typeface="맑은 고딕"/>
                           <a:cs typeface="맑은 고딕"/>
                         </a:rPr>
-                        <a:t>【발주처】</a:t>
+                        <a:t>에스케이㈜</a:t>
                       </a:r>
                     </a:p>
                   </a:txBody>
@@ -23104,7 +24111,7 @@
                         </a:spcAft>
                       </a:pPr>
                       <a:r>
-                        <a:rPr sz="1000" b="1">
+                        <a:rPr sz="900" b="1">
                           <a:solidFill>
                             <a:srgbClr val="E00000"/>
                           </a:solidFill>
@@ -23115,7 +24122,7 @@
                         <a:t>【방법론】</a:t>
                       </a:r>
                       <a:r>
-                        <a:rPr sz="1000" b="0">
+                        <a:rPr sz="900" b="0">
                           <a:solidFill>
                             <a:srgbClr val="222222"/>
                           </a:solidFill>
@@ -23126,7 +24133,904 @@
                         <a:t> / </a:t>
                       </a:r>
                       <a:r>
-                        <a:rPr sz="1000" b="1">
+                        <a:rPr sz="900" b="1">
+                          <a:solidFill>
+                            <a:srgbClr val="E00000"/>
+                          </a:solidFill>
+                          <a:latin typeface="맑은 고딕"/>
+                          <a:ea typeface="맑은 고딕"/>
+                          <a:cs typeface="맑은 고딕"/>
+                        </a:rPr>
+                        <a:t>【쪽】</a:t>
+                      </a:r>
+                    </a:p>
+                  </a:txBody>
+                  <a:tcPr marL="36000" marR="36000" marT="18000" marB="18000" anchor="ctr">
+                    <a:lnL w="10160">
+                      <a:solidFill>
+                        <a:srgbClr val="C8D3E0"/>
+                      </a:solidFill>
+                    </a:lnL>
+                    <a:lnR w="10160">
+                      <a:solidFill>
+                        <a:srgbClr val="C8D3E0"/>
+                      </a:solidFill>
+                    </a:lnR>
+                    <a:lnT w="10160">
+                      <a:solidFill>
+                        <a:srgbClr val="C8D3E0"/>
+                      </a:solidFill>
+                    </a:lnT>
+                    <a:lnB w="10160">
+                      <a:solidFill>
+                        <a:srgbClr val="C8D3E0"/>
+                      </a:solidFill>
+                    </a:lnB>
+                    <a:solidFill>
+                      <a:srgbClr val="FFFFFF"/>
+                    </a:solidFill>
+                  </a:tcPr>
+                </a:tc>
+              </a:tr>
+              <a:tr h="441367">
+                <a:tc>
+                  <a:txBody>
+                    <a:bodyPr wrap="square"/>
+                    <a:lstStyle/>
+                    <a:p>
+                      <a:pPr algn="ctr">
+                        <a:lnSpc>
+                          <a:spcPct val="115000"/>
+                        </a:lnSpc>
+                        <a:spcBef>
+                          <a:spcPts val="0"/>
+                        </a:spcBef>
+                        <a:spcAft>
+                          <a:spcPts val="0"/>
+                        </a:spcAft>
+                      </a:pPr>
+                      <a:r>
+                        <a:rPr sz="900" b="1">
+                          <a:solidFill>
+                            <a:srgbClr val="222222"/>
+                          </a:solidFill>
+                          <a:latin typeface="맑은 고딕"/>
+                          <a:ea typeface="맑은 고딕"/>
+                          <a:cs typeface="맑은 고딕"/>
+                        </a:rPr>
+                        <a:t>SKHy '25년 표준 아키텍처 구축 Ph2 (차세대)(DT)</a:t>
+                      </a:r>
+                    </a:p>
+                  </a:txBody>
+                  <a:tcPr marL="36000" marR="36000" marT="18000" marB="18000" anchor="ctr">
+                    <a:lnL w="10160">
+                      <a:solidFill>
+                        <a:srgbClr val="C8D3E0"/>
+                      </a:solidFill>
+                    </a:lnL>
+                    <a:lnR w="10160">
+                      <a:solidFill>
+                        <a:srgbClr val="C8D3E0"/>
+                      </a:solidFill>
+                    </a:lnR>
+                    <a:lnT w="10160">
+                      <a:solidFill>
+                        <a:srgbClr val="C8D3E0"/>
+                      </a:solidFill>
+                    </a:lnT>
+                    <a:lnB w="10160">
+                      <a:solidFill>
+                        <a:srgbClr val="C8D3E0"/>
+                      </a:solidFill>
+                    </a:lnB>
+                    <a:solidFill>
+                      <a:srgbClr val="EEF3F9"/>
+                    </a:solidFill>
+                  </a:tcPr>
+                </a:tc>
+                <a:tc>
+                  <a:txBody>
+                    <a:bodyPr wrap="square"/>
+                    <a:lstStyle/>
+                    <a:p>
+                      <a:pPr algn="ctr">
+                        <a:lnSpc>
+                          <a:spcPct val="115000"/>
+                        </a:lnSpc>
+                        <a:spcBef>
+                          <a:spcPts val="0"/>
+                        </a:spcBef>
+                        <a:spcAft>
+                          <a:spcPts val="0"/>
+                        </a:spcAft>
+                      </a:pPr>
+                      <a:r>
+                        <a:rPr sz="900" b="0">
+                          <a:solidFill>
+                            <a:srgbClr val="222222"/>
+                          </a:solidFill>
+                          <a:latin typeface="맑은 고딕"/>
+                          <a:ea typeface="맑은 고딕"/>
+                          <a:cs typeface="맑은 고딕"/>
+                        </a:rPr>
+                        <a:t>2025.08.01 ~ 2025.12.31</a:t>
+                      </a:r>
+                    </a:p>
+                  </a:txBody>
+                  <a:tcPr marL="36000" marR="36000" marT="18000" marB="18000" anchor="ctr">
+                    <a:lnL w="10160">
+                      <a:solidFill>
+                        <a:srgbClr val="C8D3E0"/>
+                      </a:solidFill>
+                    </a:lnL>
+                    <a:lnR w="10160">
+                      <a:solidFill>
+                        <a:srgbClr val="C8D3E0"/>
+                      </a:solidFill>
+                    </a:lnR>
+                    <a:lnT w="10160">
+                      <a:solidFill>
+                        <a:srgbClr val="C8D3E0"/>
+                      </a:solidFill>
+                    </a:lnT>
+                    <a:lnB w="10160">
+                      <a:solidFill>
+                        <a:srgbClr val="C8D3E0"/>
+                      </a:solidFill>
+                    </a:lnB>
+                    <a:solidFill>
+                      <a:srgbClr val="FFFFFF"/>
+                    </a:solidFill>
+                  </a:tcPr>
+                </a:tc>
+                <a:tc>
+                  <a:txBody>
+                    <a:bodyPr wrap="square"/>
+                    <a:lstStyle/>
+                    <a:p>
+                      <a:pPr algn="ctr">
+                        <a:lnSpc>
+                          <a:spcPct val="115000"/>
+                        </a:lnSpc>
+                        <a:spcBef>
+                          <a:spcPts val="0"/>
+                        </a:spcBef>
+                        <a:spcAft>
+                          <a:spcPts val="0"/>
+                        </a:spcAft>
+                      </a:pPr>
+                      <a:r>
+                        <a:rPr sz="900" b="0">
+                          <a:solidFill>
+                            <a:srgbClr val="222222"/>
+                          </a:solidFill>
+                          <a:latin typeface="맑은 고딕"/>
+                          <a:ea typeface="맑은 고딕"/>
+                          <a:cs typeface="맑은 고딕"/>
+                        </a:rPr>
+                        <a:t>1,999.758</a:t>
+                      </a:r>
+                    </a:p>
+                  </a:txBody>
+                  <a:tcPr marL="36000" marR="36000" marT="18000" marB="18000" anchor="ctr">
+                    <a:lnL w="10160">
+                      <a:solidFill>
+                        <a:srgbClr val="C8D3E0"/>
+                      </a:solidFill>
+                    </a:lnL>
+                    <a:lnR w="10160">
+                      <a:solidFill>
+                        <a:srgbClr val="C8D3E0"/>
+                      </a:solidFill>
+                    </a:lnR>
+                    <a:lnT w="10160">
+                      <a:solidFill>
+                        <a:srgbClr val="C8D3E0"/>
+                      </a:solidFill>
+                    </a:lnT>
+                    <a:lnB w="10160">
+                      <a:solidFill>
+                        <a:srgbClr val="C8D3E0"/>
+                      </a:solidFill>
+                    </a:lnB>
+                    <a:solidFill>
+                      <a:srgbClr val="FFFFFF"/>
+                    </a:solidFill>
+                  </a:tcPr>
+                </a:tc>
+                <a:tc>
+                  <a:txBody>
+                    <a:bodyPr wrap="square"/>
+                    <a:lstStyle/>
+                    <a:p>
+                      <a:pPr algn="ctr">
+                        <a:lnSpc>
+                          <a:spcPct val="115000"/>
+                        </a:lnSpc>
+                        <a:spcBef>
+                          <a:spcPts val="0"/>
+                        </a:spcBef>
+                        <a:spcAft>
+                          <a:spcPts val="0"/>
+                        </a:spcAft>
+                      </a:pPr>
+                      <a:r>
+                        <a:rPr sz="900" b="0">
+                          <a:solidFill>
+                            <a:srgbClr val="222222"/>
+                          </a:solidFill>
+                          <a:latin typeface="맑은 고딕"/>
+                          <a:ea typeface="맑은 고딕"/>
+                          <a:cs typeface="맑은 고딕"/>
+                        </a:rPr>
+                        <a:t>에스케이㈜</a:t>
+                      </a:r>
+                    </a:p>
+                  </a:txBody>
+                  <a:tcPr marL="36000" marR="36000" marT="18000" marB="18000" anchor="ctr">
+                    <a:lnL w="10160">
+                      <a:solidFill>
+                        <a:srgbClr val="C8D3E0"/>
+                      </a:solidFill>
+                    </a:lnL>
+                    <a:lnR w="10160">
+                      <a:solidFill>
+                        <a:srgbClr val="C8D3E0"/>
+                      </a:solidFill>
+                    </a:lnR>
+                    <a:lnT w="10160">
+                      <a:solidFill>
+                        <a:srgbClr val="C8D3E0"/>
+                      </a:solidFill>
+                    </a:lnT>
+                    <a:lnB w="10160">
+                      <a:solidFill>
+                        <a:srgbClr val="C8D3E0"/>
+                      </a:solidFill>
+                    </a:lnB>
+                    <a:solidFill>
+                      <a:srgbClr val="FFFFFF"/>
+                    </a:solidFill>
+                  </a:tcPr>
+                </a:tc>
+                <a:tc>
+                  <a:txBody>
+                    <a:bodyPr wrap="square"/>
+                    <a:lstStyle/>
+                    <a:p>
+                      <a:pPr algn="l">
+                        <a:lnSpc>
+                          <a:spcPct val="115000"/>
+                        </a:lnSpc>
+                        <a:spcBef>
+                          <a:spcPts val="0"/>
+                        </a:spcBef>
+                        <a:spcAft>
+                          <a:spcPts val="0"/>
+                        </a:spcAft>
+                      </a:pPr>
+                      <a:r>
+                        <a:rPr sz="900" b="1">
+                          <a:solidFill>
+                            <a:srgbClr val="E00000"/>
+                          </a:solidFill>
+                          <a:latin typeface="맑은 고딕"/>
+                          <a:ea typeface="맑은 고딕"/>
+                          <a:cs typeface="맑은 고딕"/>
+                        </a:rPr>
+                        <a:t>【방법론】</a:t>
+                      </a:r>
+                      <a:r>
+                        <a:rPr sz="900" b="0">
+                          <a:solidFill>
+                            <a:srgbClr val="222222"/>
+                          </a:solidFill>
+                          <a:latin typeface="맑은 고딕"/>
+                          <a:ea typeface="맑은 고딕"/>
+                          <a:cs typeface="맑은 고딕"/>
+                        </a:rPr>
+                        <a:t> / </a:t>
+                      </a:r>
+                      <a:r>
+                        <a:rPr sz="900" b="1">
+                          <a:solidFill>
+                            <a:srgbClr val="E00000"/>
+                          </a:solidFill>
+                          <a:latin typeface="맑은 고딕"/>
+                          <a:ea typeface="맑은 고딕"/>
+                          <a:cs typeface="맑은 고딕"/>
+                        </a:rPr>
+                        <a:t>【쪽】</a:t>
+                      </a:r>
+                    </a:p>
+                  </a:txBody>
+                  <a:tcPr marL="36000" marR="36000" marT="18000" marB="18000" anchor="ctr">
+                    <a:lnL w="10160">
+                      <a:solidFill>
+                        <a:srgbClr val="C8D3E0"/>
+                      </a:solidFill>
+                    </a:lnL>
+                    <a:lnR w="10160">
+                      <a:solidFill>
+                        <a:srgbClr val="C8D3E0"/>
+                      </a:solidFill>
+                    </a:lnR>
+                    <a:lnT w="10160">
+                      <a:solidFill>
+                        <a:srgbClr val="C8D3E0"/>
+                      </a:solidFill>
+                    </a:lnT>
+                    <a:lnB w="10160">
+                      <a:solidFill>
+                        <a:srgbClr val="C8D3E0"/>
+                      </a:solidFill>
+                    </a:lnB>
+                    <a:solidFill>
+                      <a:srgbClr val="FFFFFF"/>
+                    </a:solidFill>
+                  </a:tcPr>
+                </a:tc>
+              </a:tr>
+              <a:tr h="441367">
+                <a:tc>
+                  <a:txBody>
+                    <a:bodyPr wrap="square"/>
+                    <a:lstStyle/>
+                    <a:p>
+                      <a:pPr algn="ctr">
+                        <a:lnSpc>
+                          <a:spcPct val="115000"/>
+                        </a:lnSpc>
+                        <a:spcBef>
+                          <a:spcPts val="0"/>
+                        </a:spcBef>
+                        <a:spcAft>
+                          <a:spcPts val="0"/>
+                        </a:spcAft>
+                      </a:pPr>
+                      <a:r>
+                        <a:rPr sz="900" b="1">
+                          <a:solidFill>
+                            <a:srgbClr val="222222"/>
+                          </a:solidFill>
+                          <a:latin typeface="맑은 고딕"/>
+                          <a:ea typeface="맑은 고딕"/>
+                          <a:cs typeface="맑은 고딕"/>
+                        </a:rPr>
+                        <a:t>SKHy 25년 차세대 표준 아키텍처 구축 Ph1</a:t>
+                      </a:r>
+                    </a:p>
+                  </a:txBody>
+                  <a:tcPr marL="36000" marR="36000" marT="18000" marB="18000" anchor="ctr">
+                    <a:lnL w="10160">
+                      <a:solidFill>
+                        <a:srgbClr val="C8D3E0"/>
+                      </a:solidFill>
+                    </a:lnL>
+                    <a:lnR w="10160">
+                      <a:solidFill>
+                        <a:srgbClr val="C8D3E0"/>
+                      </a:solidFill>
+                    </a:lnR>
+                    <a:lnT w="10160">
+                      <a:solidFill>
+                        <a:srgbClr val="C8D3E0"/>
+                      </a:solidFill>
+                    </a:lnT>
+                    <a:lnB w="10160">
+                      <a:solidFill>
+                        <a:srgbClr val="C8D3E0"/>
+                      </a:solidFill>
+                    </a:lnB>
+                    <a:solidFill>
+                      <a:srgbClr val="EEF3F9"/>
+                    </a:solidFill>
+                  </a:tcPr>
+                </a:tc>
+                <a:tc>
+                  <a:txBody>
+                    <a:bodyPr wrap="square"/>
+                    <a:lstStyle/>
+                    <a:p>
+                      <a:pPr algn="ctr">
+                        <a:lnSpc>
+                          <a:spcPct val="115000"/>
+                        </a:lnSpc>
+                        <a:spcBef>
+                          <a:spcPts val="0"/>
+                        </a:spcBef>
+                        <a:spcAft>
+                          <a:spcPts val="0"/>
+                        </a:spcAft>
+                      </a:pPr>
+                      <a:r>
+                        <a:rPr sz="900" b="0">
+                          <a:solidFill>
+                            <a:srgbClr val="222222"/>
+                          </a:solidFill>
+                          <a:latin typeface="맑은 고딕"/>
+                          <a:ea typeface="맑은 고딕"/>
+                          <a:cs typeface="맑은 고딕"/>
+                        </a:rPr>
+                        <a:t>2024.12.01 ~ 2025.01.31</a:t>
+                      </a:r>
+                    </a:p>
+                  </a:txBody>
+                  <a:tcPr marL="36000" marR="36000" marT="18000" marB="18000" anchor="ctr">
+                    <a:lnL w="10160">
+                      <a:solidFill>
+                        <a:srgbClr val="C8D3E0"/>
+                      </a:solidFill>
+                    </a:lnL>
+                    <a:lnR w="10160">
+                      <a:solidFill>
+                        <a:srgbClr val="C8D3E0"/>
+                      </a:solidFill>
+                    </a:lnR>
+                    <a:lnT w="10160">
+                      <a:solidFill>
+                        <a:srgbClr val="C8D3E0"/>
+                      </a:solidFill>
+                    </a:lnT>
+                    <a:lnB w="10160">
+                      <a:solidFill>
+                        <a:srgbClr val="C8D3E0"/>
+                      </a:solidFill>
+                    </a:lnB>
+                    <a:solidFill>
+                      <a:srgbClr val="FFFFFF"/>
+                    </a:solidFill>
+                  </a:tcPr>
+                </a:tc>
+                <a:tc>
+                  <a:txBody>
+                    <a:bodyPr wrap="square"/>
+                    <a:lstStyle/>
+                    <a:p>
+                      <a:pPr algn="ctr">
+                        <a:lnSpc>
+                          <a:spcPct val="115000"/>
+                        </a:lnSpc>
+                        <a:spcBef>
+                          <a:spcPts val="0"/>
+                        </a:spcBef>
+                        <a:spcAft>
+                          <a:spcPts val="0"/>
+                        </a:spcAft>
+                      </a:pPr>
+                      <a:r>
+                        <a:rPr sz="900" b="0">
+                          <a:solidFill>
+                            <a:srgbClr val="222222"/>
+                          </a:solidFill>
+                          <a:latin typeface="맑은 고딕"/>
+                          <a:ea typeface="맑은 고딕"/>
+                          <a:cs typeface="맑은 고딕"/>
+                        </a:rPr>
+                        <a:t>220.104</a:t>
+                      </a:r>
+                    </a:p>
+                  </a:txBody>
+                  <a:tcPr marL="36000" marR="36000" marT="18000" marB="18000" anchor="ctr">
+                    <a:lnL w="10160">
+                      <a:solidFill>
+                        <a:srgbClr val="C8D3E0"/>
+                      </a:solidFill>
+                    </a:lnL>
+                    <a:lnR w="10160">
+                      <a:solidFill>
+                        <a:srgbClr val="C8D3E0"/>
+                      </a:solidFill>
+                    </a:lnR>
+                    <a:lnT w="10160">
+                      <a:solidFill>
+                        <a:srgbClr val="C8D3E0"/>
+                      </a:solidFill>
+                    </a:lnT>
+                    <a:lnB w="10160">
+                      <a:solidFill>
+                        <a:srgbClr val="C8D3E0"/>
+                      </a:solidFill>
+                    </a:lnB>
+                    <a:solidFill>
+                      <a:srgbClr val="FFFFFF"/>
+                    </a:solidFill>
+                  </a:tcPr>
+                </a:tc>
+                <a:tc>
+                  <a:txBody>
+                    <a:bodyPr wrap="square"/>
+                    <a:lstStyle/>
+                    <a:p>
+                      <a:pPr algn="ctr">
+                        <a:lnSpc>
+                          <a:spcPct val="115000"/>
+                        </a:lnSpc>
+                        <a:spcBef>
+                          <a:spcPts val="0"/>
+                        </a:spcBef>
+                        <a:spcAft>
+                          <a:spcPts val="0"/>
+                        </a:spcAft>
+                      </a:pPr>
+                      <a:r>
+                        <a:rPr sz="900" b="0">
+                          <a:solidFill>
+                            <a:srgbClr val="222222"/>
+                          </a:solidFill>
+                          <a:latin typeface="맑은 고딕"/>
+                          <a:ea typeface="맑은 고딕"/>
+                          <a:cs typeface="맑은 고딕"/>
+                        </a:rPr>
+                        <a:t>에스케이㈜</a:t>
+                      </a:r>
+                    </a:p>
+                  </a:txBody>
+                  <a:tcPr marL="36000" marR="36000" marT="18000" marB="18000" anchor="ctr">
+                    <a:lnL w="10160">
+                      <a:solidFill>
+                        <a:srgbClr val="C8D3E0"/>
+                      </a:solidFill>
+                    </a:lnL>
+                    <a:lnR w="10160">
+                      <a:solidFill>
+                        <a:srgbClr val="C8D3E0"/>
+                      </a:solidFill>
+                    </a:lnR>
+                    <a:lnT w="10160">
+                      <a:solidFill>
+                        <a:srgbClr val="C8D3E0"/>
+                      </a:solidFill>
+                    </a:lnT>
+                    <a:lnB w="10160">
+                      <a:solidFill>
+                        <a:srgbClr val="C8D3E0"/>
+                      </a:solidFill>
+                    </a:lnB>
+                    <a:solidFill>
+                      <a:srgbClr val="FFFFFF"/>
+                    </a:solidFill>
+                  </a:tcPr>
+                </a:tc>
+                <a:tc>
+                  <a:txBody>
+                    <a:bodyPr wrap="square"/>
+                    <a:lstStyle/>
+                    <a:p>
+                      <a:pPr algn="l">
+                        <a:lnSpc>
+                          <a:spcPct val="115000"/>
+                        </a:lnSpc>
+                        <a:spcBef>
+                          <a:spcPts val="0"/>
+                        </a:spcBef>
+                        <a:spcAft>
+                          <a:spcPts val="0"/>
+                        </a:spcAft>
+                      </a:pPr>
+                      <a:r>
+                        <a:rPr sz="900" b="1">
+                          <a:solidFill>
+                            <a:srgbClr val="E00000"/>
+                          </a:solidFill>
+                          <a:latin typeface="맑은 고딕"/>
+                          <a:ea typeface="맑은 고딕"/>
+                          <a:cs typeface="맑은 고딕"/>
+                        </a:rPr>
+                        <a:t>【방법론】</a:t>
+                      </a:r>
+                      <a:r>
+                        <a:rPr sz="900" b="0">
+                          <a:solidFill>
+                            <a:srgbClr val="222222"/>
+                          </a:solidFill>
+                          <a:latin typeface="맑은 고딕"/>
+                          <a:ea typeface="맑은 고딕"/>
+                          <a:cs typeface="맑은 고딕"/>
+                        </a:rPr>
+                        <a:t> / </a:t>
+                      </a:r>
+                      <a:r>
+                        <a:rPr sz="900" b="1">
+                          <a:solidFill>
+                            <a:srgbClr val="E00000"/>
+                          </a:solidFill>
+                          <a:latin typeface="맑은 고딕"/>
+                          <a:ea typeface="맑은 고딕"/>
+                          <a:cs typeface="맑은 고딕"/>
+                        </a:rPr>
+                        <a:t>【쪽】</a:t>
+                      </a:r>
+                    </a:p>
+                  </a:txBody>
+                  <a:tcPr marL="36000" marR="36000" marT="18000" marB="18000" anchor="ctr">
+                    <a:lnL w="10160">
+                      <a:solidFill>
+                        <a:srgbClr val="C8D3E0"/>
+                      </a:solidFill>
+                    </a:lnL>
+                    <a:lnR w="10160">
+                      <a:solidFill>
+                        <a:srgbClr val="C8D3E0"/>
+                      </a:solidFill>
+                    </a:lnR>
+                    <a:lnT w="10160">
+                      <a:solidFill>
+                        <a:srgbClr val="C8D3E0"/>
+                      </a:solidFill>
+                    </a:lnT>
+                    <a:lnB w="10160">
+                      <a:solidFill>
+                        <a:srgbClr val="C8D3E0"/>
+                      </a:solidFill>
+                    </a:lnB>
+                    <a:solidFill>
+                      <a:srgbClr val="FFFFFF"/>
+                    </a:solidFill>
+                  </a:tcPr>
+                </a:tc>
+              </a:tr>
+              <a:tr h="441367">
+                <a:tc>
+                  <a:txBody>
+                    <a:bodyPr wrap="square"/>
+                    <a:lstStyle/>
+                    <a:p>
+                      <a:pPr algn="ctr">
+                        <a:lnSpc>
+                          <a:spcPct val="115000"/>
+                        </a:lnSpc>
+                        <a:spcBef>
+                          <a:spcPts val="0"/>
+                        </a:spcBef>
+                        <a:spcAft>
+                          <a:spcPts val="0"/>
+                        </a:spcAft>
+                      </a:pPr>
+                      <a:r>
+                        <a:rPr sz="900" b="1">
+                          <a:solidFill>
+                            <a:srgbClr val="222222"/>
+                          </a:solidFill>
+                          <a:latin typeface="맑은 고딕"/>
+                          <a:ea typeface="맑은 고딕"/>
+                          <a:cs typeface="맑은 고딕"/>
+                        </a:rPr>
+                        <a:t>CELLO SQUARE 통합운영플랫폼 구축</a:t>
+                      </a:r>
+                    </a:p>
+                  </a:txBody>
+                  <a:tcPr marL="36000" marR="36000" marT="18000" marB="18000" anchor="ctr">
+                    <a:lnL w="10160">
+                      <a:solidFill>
+                        <a:srgbClr val="C8D3E0"/>
+                      </a:solidFill>
+                    </a:lnL>
+                    <a:lnR w="10160">
+                      <a:solidFill>
+                        <a:srgbClr val="C8D3E0"/>
+                      </a:solidFill>
+                    </a:lnR>
+                    <a:lnT w="10160">
+                      <a:solidFill>
+                        <a:srgbClr val="C8D3E0"/>
+                      </a:solidFill>
+                    </a:lnT>
+                    <a:lnB w="10160">
+                      <a:solidFill>
+                        <a:srgbClr val="C8D3E0"/>
+                      </a:solidFill>
+                    </a:lnB>
+                    <a:solidFill>
+                      <a:srgbClr val="EEF3F9"/>
+                    </a:solidFill>
+                  </a:tcPr>
+                </a:tc>
+                <a:tc>
+                  <a:txBody>
+                    <a:bodyPr wrap="square"/>
+                    <a:lstStyle/>
+                    <a:p>
+                      <a:pPr algn="ctr">
+                        <a:lnSpc>
+                          <a:spcPct val="115000"/>
+                        </a:lnSpc>
+                        <a:spcBef>
+                          <a:spcPts val="0"/>
+                        </a:spcBef>
+                        <a:spcAft>
+                          <a:spcPts val="0"/>
+                        </a:spcAft>
+                      </a:pPr>
+                      <a:r>
+                        <a:rPr sz="900" b="0">
+                          <a:solidFill>
+                            <a:srgbClr val="222222"/>
+                          </a:solidFill>
+                          <a:latin typeface="맑은 고딕"/>
+                          <a:ea typeface="맑은 고딕"/>
+                          <a:cs typeface="맑은 고딕"/>
+                        </a:rPr>
+                        <a:t>2024.04.02 ~ 2024.12.31</a:t>
+                      </a:r>
+                    </a:p>
+                  </a:txBody>
+                  <a:tcPr marL="36000" marR="36000" marT="18000" marB="18000" anchor="ctr">
+                    <a:lnL w="10160">
+                      <a:solidFill>
+                        <a:srgbClr val="C8D3E0"/>
+                      </a:solidFill>
+                    </a:lnL>
+                    <a:lnR w="10160">
+                      <a:solidFill>
+                        <a:srgbClr val="C8D3E0"/>
+                      </a:solidFill>
+                    </a:lnR>
+                    <a:lnT w="10160">
+                      <a:solidFill>
+                        <a:srgbClr val="C8D3E0"/>
+                      </a:solidFill>
+                    </a:lnT>
+                    <a:lnB w="10160">
+                      <a:solidFill>
+                        <a:srgbClr val="C8D3E0"/>
+                      </a:solidFill>
+                    </a:lnB>
+                    <a:solidFill>
+                      <a:srgbClr val="FFFFFF"/>
+                    </a:solidFill>
+                  </a:tcPr>
+                </a:tc>
+                <a:tc>
+                  <a:txBody>
+                    <a:bodyPr wrap="square"/>
+                    <a:lstStyle/>
+                    <a:p>
+                      <a:pPr algn="ctr">
+                        <a:lnSpc>
+                          <a:spcPct val="115000"/>
+                        </a:lnSpc>
+                        <a:spcBef>
+                          <a:spcPts val="0"/>
+                        </a:spcBef>
+                        <a:spcAft>
+                          <a:spcPts val="0"/>
+                        </a:spcAft>
+                      </a:pPr>
+                      <a:r>
+                        <a:rPr sz="900" b="0">
+                          <a:solidFill>
+                            <a:srgbClr val="222222"/>
+                          </a:solidFill>
+                          <a:latin typeface="맑은 고딕"/>
+                          <a:ea typeface="맑은 고딕"/>
+                          <a:cs typeface="맑은 고딕"/>
+                        </a:rPr>
+                        <a:t>1,444.700</a:t>
+                      </a:r>
+                    </a:p>
+                  </a:txBody>
+                  <a:tcPr marL="36000" marR="36000" marT="18000" marB="18000" anchor="ctr">
+                    <a:lnL w="10160">
+                      <a:solidFill>
+                        <a:srgbClr val="C8D3E0"/>
+                      </a:solidFill>
+                    </a:lnL>
+                    <a:lnR w="10160">
+                      <a:solidFill>
+                        <a:srgbClr val="C8D3E0"/>
+                      </a:solidFill>
+                    </a:lnR>
+                    <a:lnT w="10160">
+                      <a:solidFill>
+                        <a:srgbClr val="C8D3E0"/>
+                      </a:solidFill>
+                    </a:lnT>
+                    <a:lnB w="10160">
+                      <a:solidFill>
+                        <a:srgbClr val="C8D3E0"/>
+                      </a:solidFill>
+                    </a:lnB>
+                    <a:solidFill>
+                      <a:srgbClr val="FFFFFF"/>
+                    </a:solidFill>
+                  </a:tcPr>
+                </a:tc>
+                <a:tc>
+                  <a:txBody>
+                    <a:bodyPr wrap="square"/>
+                    <a:lstStyle/>
+                    <a:p>
+                      <a:pPr algn="ctr">
+                        <a:lnSpc>
+                          <a:spcPct val="115000"/>
+                        </a:lnSpc>
+                        <a:spcBef>
+                          <a:spcPts val="0"/>
+                        </a:spcBef>
+                        <a:spcAft>
+                          <a:spcPts val="0"/>
+                        </a:spcAft>
+                      </a:pPr>
+                      <a:r>
+                        <a:rPr sz="900" b="0">
+                          <a:solidFill>
+                            <a:srgbClr val="222222"/>
+                          </a:solidFill>
+                          <a:latin typeface="맑은 고딕"/>
+                          <a:ea typeface="맑은 고딕"/>
+                          <a:cs typeface="맑은 고딕"/>
+                        </a:rPr>
+                        <a:t>삼성에스디에스㈜</a:t>
+                      </a:r>
+                    </a:p>
+                  </a:txBody>
+                  <a:tcPr marL="36000" marR="36000" marT="18000" marB="18000" anchor="ctr">
+                    <a:lnL w="10160">
+                      <a:solidFill>
+                        <a:srgbClr val="C8D3E0"/>
+                      </a:solidFill>
+                    </a:lnL>
+                    <a:lnR w="10160">
+                      <a:solidFill>
+                        <a:srgbClr val="C8D3E0"/>
+                      </a:solidFill>
+                    </a:lnR>
+                    <a:lnT w="10160">
+                      <a:solidFill>
+                        <a:srgbClr val="C8D3E0"/>
+                      </a:solidFill>
+                    </a:lnT>
+                    <a:lnB w="10160">
+                      <a:solidFill>
+                        <a:srgbClr val="C8D3E0"/>
+                      </a:solidFill>
+                    </a:lnB>
+                    <a:solidFill>
+                      <a:srgbClr val="FFFFFF"/>
+                    </a:solidFill>
+                  </a:tcPr>
+                </a:tc>
+                <a:tc>
+                  <a:txBody>
+                    <a:bodyPr wrap="square"/>
+                    <a:lstStyle/>
+                    <a:p>
+                      <a:pPr algn="l">
+                        <a:lnSpc>
+                          <a:spcPct val="115000"/>
+                        </a:lnSpc>
+                        <a:spcBef>
+                          <a:spcPts val="0"/>
+                        </a:spcBef>
+                        <a:spcAft>
+                          <a:spcPts val="0"/>
+                        </a:spcAft>
+                      </a:pPr>
+                      <a:r>
+                        <a:rPr sz="900" b="1">
+                          <a:solidFill>
+                            <a:srgbClr val="E00000"/>
+                          </a:solidFill>
+                          <a:latin typeface="맑은 고딕"/>
+                          <a:ea typeface="맑은 고딕"/>
+                          <a:cs typeface="맑은 고딕"/>
+                        </a:rPr>
+                        <a:t>【방법론】</a:t>
+                      </a:r>
+                      <a:r>
+                        <a:rPr sz="900" b="0">
+                          <a:solidFill>
+                            <a:srgbClr val="222222"/>
+                          </a:solidFill>
+                          <a:latin typeface="맑은 고딕"/>
+                          <a:ea typeface="맑은 고딕"/>
+                          <a:cs typeface="맑은 고딕"/>
+                        </a:rPr>
+                        <a:t> / </a:t>
+                      </a:r>
+                      <a:r>
+                        <a:rPr sz="900" b="1">
                           <a:solidFill>
                             <a:srgbClr val="E00000"/>
                           </a:solidFill>
@@ -23178,8 +25082,8 @@
           <p:nvPr/>
         </p:nvGraphicFramePr>
         <p:xfrm>
-          <a:off x="316800" y="6514847"/>
-          <a:ext cx="6260400" cy="2468808"/>
+          <a:off x="316800" y="6978304"/>
+          <a:ext cx="6260400" cy="1674000"/>
         </p:xfrm>
         <a:graphic>
           <a:graphicData uri="http://schemas.openxmlformats.org/drawingml/2006/table">
@@ -23188,7 +25092,7 @@
               <a:tblGrid>
                 <a:gridCol w="6260400"/>
               </a:tblGrid>
-              <a:tr h="450000">
+              <a:tr h="306000">
                 <a:tc>
                   <a:txBody>
                     <a:bodyPr wrap="square"/>
@@ -23206,7 +25110,7 @@
                         </a:spcAft>
                       </a:pPr>
                       <a:r>
-                        <a:rPr sz="1050" b="1">
+                        <a:rPr sz="950" b="1">
                           <a:solidFill>
                             <a:srgbClr val="FFFFFF"/>
                           </a:solidFill>
@@ -23245,7 +25149,7 @@
                   </a:tcPr>
                 </a:tc>
               </a:tr>
-              <a:tr h="560808">
+              <a:tr h="342000">
                 <a:tc>
                   <a:txBody>
                     <a:bodyPr wrap="square"/>
@@ -23263,7 +25167,7 @@
                         </a:spcAft>
                       </a:pPr>
                       <a:r>
-                        <a:rPr sz="1000" b="1">
+                        <a:rPr sz="900" b="1">
                           <a:solidFill>
                             <a:srgbClr val="222222"/>
                           </a:solidFill>
@@ -23302,7 +25206,7 @@
                   </a:tcPr>
                 </a:tc>
               </a:tr>
-              <a:tr h="486000">
+              <a:tr h="342000">
                 <a:tc>
                   <a:txBody>
                     <a:bodyPr wrap="square"/>
@@ -23320,7 +25224,7 @@
                         </a:spcAft>
                       </a:pPr>
                       <a:r>
-                        <a:rPr sz="1000" b="1">
+                        <a:rPr sz="900" b="1">
                           <a:solidFill>
                             <a:srgbClr val="222222"/>
                           </a:solidFill>
@@ -23359,7 +25263,7 @@
                   </a:tcPr>
                 </a:tc>
               </a:tr>
-              <a:tr h="486000">
+              <a:tr h="342000">
                 <a:tc>
                   <a:txBody>
                     <a:bodyPr wrap="square"/>
@@ -23377,7 +25281,7 @@
                         </a:spcAft>
                       </a:pPr>
                       <a:r>
-                        <a:rPr sz="1000" b="1">
+                        <a:rPr sz="900" b="1">
                           <a:solidFill>
                             <a:srgbClr val="222222"/>
                           </a:solidFill>
@@ -23416,7 +25320,7 @@
                   </a:tcPr>
                 </a:tc>
               </a:tr>
-              <a:tr h="486000">
+              <a:tr h="342000">
                 <a:tc>
                   <a:txBody>
                     <a:bodyPr wrap="square"/>
@@ -23434,7 +25338,7 @@
                         </a:spcAft>
                       </a:pPr>
                       <a:r>
-                        <a:rPr sz="1000" b="1">
+                        <a:rPr sz="900" b="1">
                           <a:solidFill>
                             <a:srgbClr val="222222"/>
                           </a:solidFill>
@@ -23919,7 +25823,7 @@
         </p:nvGraphicFramePr>
         <p:xfrm>
           <a:off x="316800" y="2358000"/>
-          <a:ext cx="6260398" cy="4743845"/>
+          <a:ext cx="6260398" cy="4865253"/>
         </p:xfrm>
         <a:graphic>
           <a:graphicData uri="http://schemas.openxmlformats.org/drawingml/2006/table">
@@ -23933,7 +25837,7 @@
                 <a:gridCol w="782550"/>
                 <a:gridCol w="860805"/>
               </a:tblGrid>
-              <a:tr h="696769">
+              <a:tr h="517608">
                 <a:tc>
                   <a:txBody>
                     <a:bodyPr wrap="square"/>
@@ -23951,7 +25855,7 @@
                         </a:spcAft>
                       </a:pPr>
                       <a:r>
-                        <a:rPr sz="1200" b="1">
+                        <a:rPr sz="1050" b="1">
                           <a:solidFill>
                             <a:srgbClr val="FFFFFF"/>
                           </a:solidFill>
@@ -24006,7 +25910,7 @@
                         </a:spcAft>
                       </a:pPr>
                       <a:r>
-                        <a:rPr sz="1200" b="1">
+                        <a:rPr sz="1050" b="1">
                           <a:solidFill>
                             <a:srgbClr val="FFFFFF"/>
                           </a:solidFill>
@@ -24061,7 +25965,7 @@
                         </a:spcAft>
                       </a:pPr>
                       <a:r>
-                        <a:rPr sz="1200" b="1">
+                        <a:rPr sz="1050" b="1">
                           <a:solidFill>
                             <a:srgbClr val="FFFFFF"/>
                           </a:solidFill>
@@ -24116,7 +26020,7 @@
                         </a:spcAft>
                       </a:pPr>
                       <a:r>
-                        <a:rPr sz="1200" b="1">
+                        <a:rPr sz="1050" b="1">
                           <a:solidFill>
                             <a:srgbClr val="FFFFFF"/>
                           </a:solidFill>
@@ -24171,7 +26075,7 @@
                         </a:spcAft>
                       </a:pPr>
                       <a:r>
-                        <a:rPr sz="1200" b="1">
+                        <a:rPr sz="1050" b="1">
                           <a:solidFill>
                             <a:srgbClr val="FFFFFF"/>
                           </a:solidFill>
@@ -24226,7 +26130,7 @@
                         </a:spcAft>
                       </a:pPr>
                       <a:r>
-                        <a:rPr sz="1200" b="1">
+                        <a:rPr sz="1050" b="1">
                           <a:solidFill>
                             <a:srgbClr val="FFFFFF"/>
                           </a:solidFill>
@@ -24265,7 +26169,7 @@
                   </a:tcPr>
                 </a:tc>
               </a:tr>
-              <a:tr h="630000">
+              <a:tr h="413999">
                 <a:tc>
                   <a:txBody>
                     <a:bodyPr wrap="square"/>
@@ -24283,7 +26187,7 @@
                         </a:spcAft>
                       </a:pPr>
                       <a:r>
-                        <a:rPr sz="1150" b="1">
+                        <a:rPr sz="1000" b="1">
                           <a:solidFill>
                             <a:srgbClr val="222222"/>
                           </a:solidFill>
@@ -24338,7 +26242,7 @@
                         </a:spcAft>
                       </a:pPr>
                       <a:r>
-                        <a:rPr sz="1150" b="0">
+                        <a:rPr sz="1000" b="0">
                           <a:solidFill>
                             <a:srgbClr val="222222"/>
                           </a:solidFill>
@@ -24393,7 +26297,7 @@
                         </a:spcAft>
                       </a:pPr>
                       <a:r>
-                        <a:rPr sz="1150" b="1">
+                        <a:rPr sz="1000" b="1">
                           <a:solidFill>
                             <a:srgbClr val="E00000"/>
                           </a:solidFill>
@@ -24448,7 +26352,7 @@
                         </a:spcAft>
                       </a:pPr>
                       <a:r>
-                        <a:rPr sz="1150" b="1">
+                        <a:rPr sz="1000" b="1">
                           <a:solidFill>
                             <a:srgbClr val="E00000"/>
                           </a:solidFill>
@@ -24503,7 +26407,7 @@
                         </a:spcAft>
                       </a:pPr>
                       <a:r>
-                        <a:rPr sz="1150" b="1">
+                        <a:rPr sz="1000" b="1">
                           <a:solidFill>
                             <a:srgbClr val="E00000"/>
                           </a:solidFill>
@@ -24558,7 +26462,7 @@
                         </a:spcAft>
                       </a:pPr>
                       <a:r>
-                        <a:rPr sz="1150" b="1">
+                        <a:rPr sz="1000" b="1">
                           <a:solidFill>
                             <a:srgbClr val="E00000"/>
                           </a:solidFill>
@@ -24597,7 +26501,7 @@
                   </a:tcPr>
                 </a:tc>
               </a:tr>
-              <a:tr h="696769">
+              <a:tr h="517608">
                 <a:tc>
                   <a:txBody>
                     <a:bodyPr wrap="square"/>
@@ -24615,7 +26519,7 @@
                         </a:spcAft>
                       </a:pPr>
                       <a:r>
-                        <a:rPr sz="1150" b="1">
+                        <a:rPr sz="1000" b="1">
                           <a:solidFill>
                             <a:srgbClr val="222222"/>
                           </a:solidFill>
@@ -24670,7 +26574,7 @@
                         </a:spcAft>
                       </a:pPr>
                       <a:r>
-                        <a:rPr sz="1150" b="0">
+                        <a:rPr sz="1000" b="0">
                           <a:solidFill>
                             <a:srgbClr val="222222"/>
                           </a:solidFill>
@@ -24678,7 +26582,7 @@
                           <a:ea typeface="맑은 고딕"/>
                           <a:cs typeface="맑은 고딕"/>
                         </a:rPr>
-                        <a:t>SKHy 용인 Y1(M17) 제조 DT 시스템 Ph1 FAB MOS</a:t>
+                        <a:t>SKHy '26년 용인 Y1(M17) 제조 DT 시스템 Ph1_FAB MOS</a:t>
                       </a:r>
                     </a:p>
                   </a:txBody>
@@ -24725,7 +26629,7 @@
                         </a:spcAft>
                       </a:pPr>
                       <a:r>
-                        <a:rPr sz="1150" b="1">
+                        <a:rPr sz="1000" b="1">
                           <a:solidFill>
                             <a:srgbClr val="E00000"/>
                           </a:solidFill>
@@ -24780,7 +26684,7 @@
                         </a:spcAft>
                       </a:pPr>
                       <a:r>
-                        <a:rPr sz="1150" b="1">
+                        <a:rPr sz="1000" b="1">
                           <a:solidFill>
                             <a:srgbClr val="E00000"/>
                           </a:solidFill>
@@ -24835,7 +26739,7 @@
                         </a:spcAft>
                       </a:pPr>
                       <a:r>
-                        <a:rPr sz="1150" b="1">
+                        <a:rPr sz="1000" b="1">
                           <a:solidFill>
                             <a:srgbClr val="E00000"/>
                           </a:solidFill>
@@ -24890,7 +26794,7 @@
                         </a:spcAft>
                       </a:pPr>
                       <a:r>
-                        <a:rPr sz="1150" b="1">
+                        <a:rPr sz="1000" b="1">
                           <a:solidFill>
                             <a:srgbClr val="E00000"/>
                           </a:solidFill>
@@ -24929,7 +26833,7 @@
                   </a:tcPr>
                 </a:tc>
               </a:tr>
-              <a:tr h="696769">
+              <a:tr h="413999">
                 <a:tc>
                   <a:txBody>
                     <a:bodyPr wrap="square"/>
@@ -24947,7 +26851,7 @@
                         </a:spcAft>
                       </a:pPr>
                       <a:r>
-                        <a:rPr sz="1150" b="1">
+                        <a:rPr sz="1000" b="1">
                           <a:solidFill>
                             <a:srgbClr val="222222"/>
                           </a:solidFill>
@@ -25002,7 +26906,7 @@
                         </a:spcAft>
                       </a:pPr>
                       <a:r>
-                        <a:rPr sz="1150" b="0">
+                        <a:rPr sz="1000" b="0">
                           <a:solidFill>
                             <a:srgbClr val="222222"/>
                           </a:solidFill>
@@ -25057,7 +26961,7 @@
                         </a:spcAft>
                       </a:pPr>
                       <a:r>
-                        <a:rPr sz="1150" b="1">
+                        <a:rPr sz="1000" b="1">
                           <a:solidFill>
                             <a:srgbClr val="E00000"/>
                           </a:solidFill>
@@ -25112,7 +27016,7 @@
                         </a:spcAft>
                       </a:pPr>
                       <a:r>
-                        <a:rPr sz="1150" b="1">
+                        <a:rPr sz="1000" b="1">
                           <a:solidFill>
                             <a:srgbClr val="E00000"/>
                           </a:solidFill>
@@ -25167,7 +27071,7 @@
                         </a:spcAft>
                       </a:pPr>
                       <a:r>
-                        <a:rPr sz="1150" b="1">
+                        <a:rPr sz="1000" b="1">
                           <a:solidFill>
                             <a:srgbClr val="E00000"/>
                           </a:solidFill>
@@ -25222,7 +27126,7 @@
                         </a:spcAft>
                       </a:pPr>
                       <a:r>
-                        <a:rPr sz="1150" b="1">
+                        <a:rPr sz="1000" b="1">
                           <a:solidFill>
                             <a:srgbClr val="E00000"/>
                           </a:solidFill>
@@ -25261,7 +27165,7 @@
                   </a:tcPr>
                 </a:tc>
               </a:tr>
-              <a:tr h="696769">
+              <a:tr h="517608">
                 <a:tc>
                   <a:txBody>
                     <a:bodyPr wrap="square"/>
@@ -25279,7 +27183,7 @@
                         </a:spcAft>
                       </a:pPr>
                       <a:r>
-                        <a:rPr sz="1150" b="1">
+                        <a:rPr sz="1000" b="1">
                           <a:solidFill>
                             <a:srgbClr val="222222"/>
                           </a:solidFill>
@@ -25334,7 +27238,7 @@
                         </a:spcAft>
                       </a:pPr>
                       <a:r>
-                        <a:rPr sz="1150" b="0">
+                        <a:rPr sz="1000" b="0">
                           <a:solidFill>
                             <a:srgbClr val="222222"/>
                           </a:solidFill>
@@ -25342,7 +27246,7 @@
                           <a:ea typeface="맑은 고딕"/>
                           <a:cs typeface="맑은 고딕"/>
                         </a:rPr>
-                        <a:t>SKHy M14 차세대 제조 시스템 확산 FABMOS</a:t>
+                        <a:t>SKHy '26년 M14 차세대 제조 시스템 확산_FABMOS</a:t>
                       </a:r>
                     </a:p>
                   </a:txBody>
@@ -25389,7 +27293,7 @@
                         </a:spcAft>
                       </a:pPr>
                       <a:r>
-                        <a:rPr sz="1150" b="1">
+                        <a:rPr sz="1000" b="1">
                           <a:solidFill>
                             <a:srgbClr val="E00000"/>
                           </a:solidFill>
@@ -25444,7 +27348,7 @@
                         </a:spcAft>
                       </a:pPr>
                       <a:r>
-                        <a:rPr sz="1150" b="1">
+                        <a:rPr sz="1000" b="1">
                           <a:solidFill>
                             <a:srgbClr val="E00000"/>
                           </a:solidFill>
@@ -25499,7 +27403,7 @@
                         </a:spcAft>
                       </a:pPr>
                       <a:r>
-                        <a:rPr sz="1150" b="1">
+                        <a:rPr sz="1000" b="1">
                           <a:solidFill>
                             <a:srgbClr val="E00000"/>
                           </a:solidFill>
@@ -25554,7 +27458,7 @@
                         </a:spcAft>
                       </a:pPr>
                       <a:r>
-                        <a:rPr sz="1150" b="1">
+                        <a:rPr sz="1000" b="1">
                           <a:solidFill>
                             <a:srgbClr val="E00000"/>
                           </a:solidFill>
@@ -25593,7 +27497,7 @@
                   </a:tcPr>
                 </a:tc>
               </a:tr>
-              <a:tr h="696769">
+              <a:tr h="517608">
                 <a:tc>
                   <a:txBody>
                     <a:bodyPr wrap="square"/>
@@ -25611,7 +27515,7 @@
                         </a:spcAft>
                       </a:pPr>
                       <a:r>
-                        <a:rPr sz="1150" b="1">
+                        <a:rPr sz="1000" b="1">
                           <a:solidFill>
                             <a:srgbClr val="222222"/>
                           </a:solidFill>
@@ -25666,7 +27570,7 @@
                         </a:spcAft>
                       </a:pPr>
                       <a:r>
-                        <a:rPr sz="1150" b="0">
+                        <a:rPr sz="1000" b="0">
                           <a:solidFill>
                             <a:srgbClr val="222222"/>
                           </a:solidFill>
@@ -25674,7 +27578,7 @@
                           <a:ea typeface="맑은 고딕"/>
                           <a:cs typeface="맑은 고딕"/>
                         </a:rPr>
-                        <a:t>SKHy M15X Ph4 차세대 제조 시스템 FAB MOS</a:t>
+                        <a:t>SKHy '26년 M15X Ph4 차세대 제조 시스템 _FAB MOS</a:t>
                       </a:r>
                     </a:p>
                   </a:txBody>
@@ -25721,7 +27625,7 @@
                         </a:spcAft>
                       </a:pPr>
                       <a:r>
-                        <a:rPr sz="1150" b="1">
+                        <a:rPr sz="1000" b="1">
                           <a:solidFill>
                             <a:srgbClr val="E00000"/>
                           </a:solidFill>
@@ -25776,7 +27680,7 @@
                         </a:spcAft>
                       </a:pPr>
                       <a:r>
-                        <a:rPr sz="1150" b="1">
+                        <a:rPr sz="1000" b="1">
                           <a:solidFill>
                             <a:srgbClr val="E00000"/>
                           </a:solidFill>
@@ -25831,7 +27735,7 @@
                         </a:spcAft>
                       </a:pPr>
                       <a:r>
-                        <a:rPr sz="1150" b="1">
+                        <a:rPr sz="1000" b="1">
                           <a:solidFill>
                             <a:srgbClr val="E00000"/>
                           </a:solidFill>
@@ -25886,7 +27790,7 @@
                         </a:spcAft>
                       </a:pPr>
                       <a:r>
-                        <a:rPr sz="1150" b="1">
+                        <a:rPr sz="1000" b="1">
                           <a:solidFill>
                             <a:srgbClr val="E00000"/>
                           </a:solidFill>
@@ -25925,7 +27829,7 @@
                   </a:tcPr>
                 </a:tc>
               </a:tr>
-              <a:tr h="630000">
+              <a:tr h="517608">
                 <a:tc>
                   <a:txBody>
                     <a:bodyPr wrap="square"/>
@@ -25943,7 +27847,7 @@
                         </a:spcAft>
                       </a:pPr>
                       <a:r>
-                        <a:rPr sz="1150" b="1">
+                        <a:rPr sz="1000" b="1">
                           <a:solidFill>
                             <a:srgbClr val="222222"/>
                           </a:solidFill>
@@ -25998,15 +27902,15 @@
                         </a:spcAft>
                       </a:pPr>
                       <a:r>
-                        <a:rPr sz="1150" b="1">
-                          <a:solidFill>
-                            <a:srgbClr val="E00000"/>
+                        <a:rPr sz="1000" b="0">
+                          <a:solidFill>
+                            <a:srgbClr val="222222"/>
                           </a:solidFill>
                           <a:latin typeface="맑은 고딕"/>
                           <a:ea typeface="맑은 고딕"/>
                           <a:cs typeface="맑은 고딕"/>
                         </a:rPr>
-                        <a:t>【추가 실적】</a:t>
+                        <a:t>SKHy '26년 표준 아키텍처 구축 Ph3 원가선투입</a:t>
                       </a:r>
                     </a:p>
                   </a:txBody>
@@ -26053,7 +27957,7 @@
                         </a:spcAft>
                       </a:pPr>
                       <a:r>
-                        <a:rPr sz="1150" b="1">
+                        <a:rPr sz="1000" b="1">
                           <a:solidFill>
                             <a:srgbClr val="E00000"/>
                           </a:solidFill>
@@ -26108,7 +28012,7 @@
                         </a:spcAft>
                       </a:pPr>
                       <a:r>
-                        <a:rPr sz="1150" b="1">
+                        <a:rPr sz="1000" b="1">
                           <a:solidFill>
                             <a:srgbClr val="E00000"/>
                           </a:solidFill>
@@ -26163,7 +28067,7 @@
                         </a:spcAft>
                       </a:pPr>
                       <a:r>
-                        <a:rPr sz="1150" b="1">
+                        <a:rPr sz="1000" b="1">
                           <a:solidFill>
                             <a:srgbClr val="E00000"/>
                           </a:solidFill>
@@ -26218,7 +28122,1003 @@
                         </a:spcAft>
                       </a:pPr>
                       <a:r>
-                        <a:rPr sz="1150" b="1">
+                        <a:rPr sz="1000" b="1">
+                          <a:solidFill>
+                            <a:srgbClr val="E00000"/>
+                          </a:solidFill>
+                          <a:latin typeface="맑은 고딕"/>
+                          <a:ea typeface="맑은 고딕"/>
+                          <a:cs typeface="맑은 고딕"/>
+                        </a:rPr>
+                        <a:t>【쪽】</a:t>
+                      </a:r>
+                    </a:p>
+                  </a:txBody>
+                  <a:tcPr marL="36000" marR="36000" marT="18000" marB="18000" anchor="ctr">
+                    <a:lnL w="10160">
+                      <a:solidFill>
+                        <a:srgbClr val="C8D3E0"/>
+                      </a:solidFill>
+                    </a:lnL>
+                    <a:lnR w="10160">
+                      <a:solidFill>
+                        <a:srgbClr val="C8D3E0"/>
+                      </a:solidFill>
+                    </a:lnR>
+                    <a:lnT w="10160">
+                      <a:solidFill>
+                        <a:srgbClr val="C8D3E0"/>
+                      </a:solidFill>
+                    </a:lnT>
+                    <a:lnB w="10160">
+                      <a:solidFill>
+                        <a:srgbClr val="C8D3E0"/>
+                      </a:solidFill>
+                    </a:lnB>
+                    <a:solidFill>
+                      <a:srgbClr val="FFFFFF"/>
+                    </a:solidFill>
+                  </a:tcPr>
+                </a:tc>
+              </a:tr>
+              <a:tr h="517608">
+                <a:tc>
+                  <a:txBody>
+                    <a:bodyPr wrap="square"/>
+                    <a:lstStyle/>
+                    <a:p>
+                      <a:pPr algn="ctr">
+                        <a:lnSpc>
+                          <a:spcPct val="115000"/>
+                        </a:lnSpc>
+                        <a:spcBef>
+                          <a:spcPts val="0"/>
+                        </a:spcBef>
+                        <a:spcAft>
+                          <a:spcPts val="0"/>
+                        </a:spcAft>
+                      </a:pPr>
+                      <a:r>
+                        <a:rPr sz="1000" b="1">
+                          <a:solidFill>
+                            <a:srgbClr val="222222"/>
+                          </a:solidFill>
+                          <a:latin typeface="맑은 고딕"/>
+                          <a:ea typeface="맑은 고딕"/>
+                          <a:cs typeface="맑은 고딕"/>
+                        </a:rPr>
+                        <a:t>7</a:t>
+                      </a:r>
+                    </a:p>
+                  </a:txBody>
+                  <a:tcPr marL="36000" marR="36000" marT="18000" marB="18000" anchor="ctr">
+                    <a:lnL w="10160">
+                      <a:solidFill>
+                        <a:srgbClr val="C8D3E0"/>
+                      </a:solidFill>
+                    </a:lnL>
+                    <a:lnR w="10160">
+                      <a:solidFill>
+                        <a:srgbClr val="C8D3E0"/>
+                      </a:solidFill>
+                    </a:lnR>
+                    <a:lnT w="10160">
+                      <a:solidFill>
+                        <a:srgbClr val="C8D3E0"/>
+                      </a:solidFill>
+                    </a:lnT>
+                    <a:lnB w="10160">
+                      <a:solidFill>
+                        <a:srgbClr val="C8D3E0"/>
+                      </a:solidFill>
+                    </a:lnB>
+                    <a:solidFill>
+                      <a:srgbClr val="EEF3F9"/>
+                    </a:solidFill>
+                  </a:tcPr>
+                </a:tc>
+                <a:tc>
+                  <a:txBody>
+                    <a:bodyPr wrap="square"/>
+                    <a:lstStyle/>
+                    <a:p>
+                      <a:pPr algn="ctr">
+                        <a:lnSpc>
+                          <a:spcPct val="115000"/>
+                        </a:lnSpc>
+                        <a:spcBef>
+                          <a:spcPts val="0"/>
+                        </a:spcBef>
+                        <a:spcAft>
+                          <a:spcPts val="0"/>
+                        </a:spcAft>
+                      </a:pPr>
+                      <a:r>
+                        <a:rPr sz="1000" b="0">
+                          <a:solidFill>
+                            <a:srgbClr val="222222"/>
+                          </a:solidFill>
+                          <a:latin typeface="맑은 고딕"/>
+                          <a:ea typeface="맑은 고딕"/>
+                          <a:cs typeface="맑은 고딕"/>
+                        </a:rPr>
+                        <a:t>SKHy '25년 표준 아키텍처 구축 Ph2 (차세대)(DT)</a:t>
+                      </a:r>
+                    </a:p>
+                  </a:txBody>
+                  <a:tcPr marL="36000" marR="36000" marT="18000" marB="18000" anchor="ctr">
+                    <a:lnL w="10160">
+                      <a:solidFill>
+                        <a:srgbClr val="C8D3E0"/>
+                      </a:solidFill>
+                    </a:lnL>
+                    <a:lnR w="10160">
+                      <a:solidFill>
+                        <a:srgbClr val="C8D3E0"/>
+                      </a:solidFill>
+                    </a:lnR>
+                    <a:lnT w="10160">
+                      <a:solidFill>
+                        <a:srgbClr val="C8D3E0"/>
+                      </a:solidFill>
+                    </a:lnT>
+                    <a:lnB w="10160">
+                      <a:solidFill>
+                        <a:srgbClr val="C8D3E0"/>
+                      </a:solidFill>
+                    </a:lnB>
+                    <a:solidFill>
+                      <a:srgbClr val="FFFFFF"/>
+                    </a:solidFill>
+                  </a:tcPr>
+                </a:tc>
+                <a:tc>
+                  <a:txBody>
+                    <a:bodyPr wrap="square"/>
+                    <a:lstStyle/>
+                    <a:p>
+                      <a:pPr algn="ctr">
+                        <a:lnSpc>
+                          <a:spcPct val="115000"/>
+                        </a:lnSpc>
+                        <a:spcBef>
+                          <a:spcPts val="0"/>
+                        </a:spcBef>
+                        <a:spcAft>
+                          <a:spcPts val="0"/>
+                        </a:spcAft>
+                      </a:pPr>
+                      <a:r>
+                        <a:rPr sz="1000" b="1">
+                          <a:solidFill>
+                            <a:srgbClr val="E00000"/>
+                          </a:solidFill>
+                          <a:latin typeface="맑은 고딕"/>
+                          <a:ea typeface="맑은 고딕"/>
+                          <a:cs typeface="맑은 고딕"/>
+                        </a:rPr>
+                        <a:t>【발급일】</a:t>
+                      </a:r>
+                    </a:p>
+                  </a:txBody>
+                  <a:tcPr marL="36000" marR="36000" marT="18000" marB="18000" anchor="ctr">
+                    <a:lnL w="10160">
+                      <a:solidFill>
+                        <a:srgbClr val="C8D3E0"/>
+                      </a:solidFill>
+                    </a:lnL>
+                    <a:lnR w="10160">
+                      <a:solidFill>
+                        <a:srgbClr val="C8D3E0"/>
+                      </a:solidFill>
+                    </a:lnR>
+                    <a:lnT w="10160">
+                      <a:solidFill>
+                        <a:srgbClr val="C8D3E0"/>
+                      </a:solidFill>
+                    </a:lnT>
+                    <a:lnB w="10160">
+                      <a:solidFill>
+                        <a:srgbClr val="C8D3E0"/>
+                      </a:solidFill>
+                    </a:lnB>
+                    <a:solidFill>
+                      <a:srgbClr val="FFFFFF"/>
+                    </a:solidFill>
+                  </a:tcPr>
+                </a:tc>
+                <a:tc>
+                  <a:txBody>
+                    <a:bodyPr wrap="square"/>
+                    <a:lstStyle/>
+                    <a:p>
+                      <a:pPr algn="ctr">
+                        <a:lnSpc>
+                          <a:spcPct val="115000"/>
+                        </a:lnSpc>
+                        <a:spcBef>
+                          <a:spcPts val="0"/>
+                        </a:spcBef>
+                        <a:spcAft>
+                          <a:spcPts val="0"/>
+                        </a:spcAft>
+                      </a:pPr>
+                      <a:r>
+                        <a:rPr sz="1000" b="1">
+                          <a:solidFill>
+                            <a:srgbClr val="E00000"/>
+                          </a:solidFill>
+                          <a:latin typeface="맑은 고딕"/>
+                          <a:ea typeface="맑은 고딕"/>
+                          <a:cs typeface="맑은 고딕"/>
+                        </a:rPr>
+                        <a:t>【○】</a:t>
+                      </a:r>
+                    </a:p>
+                  </a:txBody>
+                  <a:tcPr marL="36000" marR="36000" marT="18000" marB="18000" anchor="ctr">
+                    <a:lnL w="10160">
+                      <a:solidFill>
+                        <a:srgbClr val="C8D3E0"/>
+                      </a:solidFill>
+                    </a:lnL>
+                    <a:lnR w="10160">
+                      <a:solidFill>
+                        <a:srgbClr val="C8D3E0"/>
+                      </a:solidFill>
+                    </a:lnR>
+                    <a:lnT w="10160">
+                      <a:solidFill>
+                        <a:srgbClr val="C8D3E0"/>
+                      </a:solidFill>
+                    </a:lnT>
+                    <a:lnB w="10160">
+                      <a:solidFill>
+                        <a:srgbClr val="C8D3E0"/>
+                      </a:solidFill>
+                    </a:lnB>
+                    <a:solidFill>
+                      <a:srgbClr val="FFFFFF"/>
+                    </a:solidFill>
+                  </a:tcPr>
+                </a:tc>
+                <a:tc>
+                  <a:txBody>
+                    <a:bodyPr wrap="square"/>
+                    <a:lstStyle/>
+                    <a:p>
+                      <a:pPr algn="ctr">
+                        <a:lnSpc>
+                          <a:spcPct val="115000"/>
+                        </a:lnSpc>
+                        <a:spcBef>
+                          <a:spcPts val="0"/>
+                        </a:spcBef>
+                        <a:spcAft>
+                          <a:spcPts val="0"/>
+                        </a:spcAft>
+                      </a:pPr>
+                      <a:r>
+                        <a:rPr sz="1000" b="1">
+                          <a:solidFill>
+                            <a:srgbClr val="E00000"/>
+                          </a:solidFill>
+                          <a:latin typeface="맑은 고딕"/>
+                          <a:ea typeface="맑은 고딕"/>
+                          <a:cs typeface="맑은 고딕"/>
+                        </a:rPr>
+                        <a:t>【○】</a:t>
+                      </a:r>
+                    </a:p>
+                  </a:txBody>
+                  <a:tcPr marL="36000" marR="36000" marT="18000" marB="18000" anchor="ctr">
+                    <a:lnL w="10160">
+                      <a:solidFill>
+                        <a:srgbClr val="C8D3E0"/>
+                      </a:solidFill>
+                    </a:lnL>
+                    <a:lnR w="10160">
+                      <a:solidFill>
+                        <a:srgbClr val="C8D3E0"/>
+                      </a:solidFill>
+                    </a:lnR>
+                    <a:lnT w="10160">
+                      <a:solidFill>
+                        <a:srgbClr val="C8D3E0"/>
+                      </a:solidFill>
+                    </a:lnT>
+                    <a:lnB w="10160">
+                      <a:solidFill>
+                        <a:srgbClr val="C8D3E0"/>
+                      </a:solidFill>
+                    </a:lnB>
+                    <a:solidFill>
+                      <a:srgbClr val="FFFFFF"/>
+                    </a:solidFill>
+                  </a:tcPr>
+                </a:tc>
+                <a:tc>
+                  <a:txBody>
+                    <a:bodyPr wrap="square"/>
+                    <a:lstStyle/>
+                    <a:p>
+                      <a:pPr algn="l">
+                        <a:lnSpc>
+                          <a:spcPct val="115000"/>
+                        </a:lnSpc>
+                        <a:spcBef>
+                          <a:spcPts val="0"/>
+                        </a:spcBef>
+                        <a:spcAft>
+                          <a:spcPts val="0"/>
+                        </a:spcAft>
+                      </a:pPr>
+                      <a:r>
+                        <a:rPr sz="1000" b="1">
+                          <a:solidFill>
+                            <a:srgbClr val="E00000"/>
+                          </a:solidFill>
+                          <a:latin typeface="맑은 고딕"/>
+                          <a:ea typeface="맑은 고딕"/>
+                          <a:cs typeface="맑은 고딕"/>
+                        </a:rPr>
+                        <a:t>【쪽】</a:t>
+                      </a:r>
+                    </a:p>
+                  </a:txBody>
+                  <a:tcPr marL="36000" marR="36000" marT="18000" marB="18000" anchor="ctr">
+                    <a:lnL w="10160">
+                      <a:solidFill>
+                        <a:srgbClr val="C8D3E0"/>
+                      </a:solidFill>
+                    </a:lnL>
+                    <a:lnR w="10160">
+                      <a:solidFill>
+                        <a:srgbClr val="C8D3E0"/>
+                      </a:solidFill>
+                    </a:lnR>
+                    <a:lnT w="10160">
+                      <a:solidFill>
+                        <a:srgbClr val="C8D3E0"/>
+                      </a:solidFill>
+                    </a:lnT>
+                    <a:lnB w="10160">
+                      <a:solidFill>
+                        <a:srgbClr val="C8D3E0"/>
+                      </a:solidFill>
+                    </a:lnB>
+                    <a:solidFill>
+                      <a:srgbClr val="FFFFFF"/>
+                    </a:solidFill>
+                  </a:tcPr>
+                </a:tc>
+              </a:tr>
+              <a:tr h="517608">
+                <a:tc>
+                  <a:txBody>
+                    <a:bodyPr wrap="square"/>
+                    <a:lstStyle/>
+                    <a:p>
+                      <a:pPr algn="ctr">
+                        <a:lnSpc>
+                          <a:spcPct val="115000"/>
+                        </a:lnSpc>
+                        <a:spcBef>
+                          <a:spcPts val="0"/>
+                        </a:spcBef>
+                        <a:spcAft>
+                          <a:spcPts val="0"/>
+                        </a:spcAft>
+                      </a:pPr>
+                      <a:r>
+                        <a:rPr sz="1000" b="1">
+                          <a:solidFill>
+                            <a:srgbClr val="222222"/>
+                          </a:solidFill>
+                          <a:latin typeface="맑은 고딕"/>
+                          <a:ea typeface="맑은 고딕"/>
+                          <a:cs typeface="맑은 고딕"/>
+                        </a:rPr>
+                        <a:t>8</a:t>
+                      </a:r>
+                    </a:p>
+                  </a:txBody>
+                  <a:tcPr marL="36000" marR="36000" marT="18000" marB="18000" anchor="ctr">
+                    <a:lnL w="10160">
+                      <a:solidFill>
+                        <a:srgbClr val="C8D3E0"/>
+                      </a:solidFill>
+                    </a:lnL>
+                    <a:lnR w="10160">
+                      <a:solidFill>
+                        <a:srgbClr val="C8D3E0"/>
+                      </a:solidFill>
+                    </a:lnR>
+                    <a:lnT w="10160">
+                      <a:solidFill>
+                        <a:srgbClr val="C8D3E0"/>
+                      </a:solidFill>
+                    </a:lnT>
+                    <a:lnB w="10160">
+                      <a:solidFill>
+                        <a:srgbClr val="C8D3E0"/>
+                      </a:solidFill>
+                    </a:lnB>
+                    <a:solidFill>
+                      <a:srgbClr val="EEF3F9"/>
+                    </a:solidFill>
+                  </a:tcPr>
+                </a:tc>
+                <a:tc>
+                  <a:txBody>
+                    <a:bodyPr wrap="square"/>
+                    <a:lstStyle/>
+                    <a:p>
+                      <a:pPr algn="ctr">
+                        <a:lnSpc>
+                          <a:spcPct val="115000"/>
+                        </a:lnSpc>
+                        <a:spcBef>
+                          <a:spcPts val="0"/>
+                        </a:spcBef>
+                        <a:spcAft>
+                          <a:spcPts val="0"/>
+                        </a:spcAft>
+                      </a:pPr>
+                      <a:r>
+                        <a:rPr sz="1000" b="0">
+                          <a:solidFill>
+                            <a:srgbClr val="222222"/>
+                          </a:solidFill>
+                          <a:latin typeface="맑은 고딕"/>
+                          <a:ea typeface="맑은 고딕"/>
+                          <a:cs typeface="맑은 고딕"/>
+                        </a:rPr>
+                        <a:t>SKHy 25년 차세대 표준 아키텍처 구축 Ph1</a:t>
+                      </a:r>
+                    </a:p>
+                  </a:txBody>
+                  <a:tcPr marL="36000" marR="36000" marT="18000" marB="18000" anchor="ctr">
+                    <a:lnL w="10160">
+                      <a:solidFill>
+                        <a:srgbClr val="C8D3E0"/>
+                      </a:solidFill>
+                    </a:lnL>
+                    <a:lnR w="10160">
+                      <a:solidFill>
+                        <a:srgbClr val="C8D3E0"/>
+                      </a:solidFill>
+                    </a:lnR>
+                    <a:lnT w="10160">
+                      <a:solidFill>
+                        <a:srgbClr val="C8D3E0"/>
+                      </a:solidFill>
+                    </a:lnT>
+                    <a:lnB w="10160">
+                      <a:solidFill>
+                        <a:srgbClr val="C8D3E0"/>
+                      </a:solidFill>
+                    </a:lnB>
+                    <a:solidFill>
+                      <a:srgbClr val="FFFFFF"/>
+                    </a:solidFill>
+                  </a:tcPr>
+                </a:tc>
+                <a:tc>
+                  <a:txBody>
+                    <a:bodyPr wrap="square"/>
+                    <a:lstStyle/>
+                    <a:p>
+                      <a:pPr algn="ctr">
+                        <a:lnSpc>
+                          <a:spcPct val="115000"/>
+                        </a:lnSpc>
+                        <a:spcBef>
+                          <a:spcPts val="0"/>
+                        </a:spcBef>
+                        <a:spcAft>
+                          <a:spcPts val="0"/>
+                        </a:spcAft>
+                      </a:pPr>
+                      <a:r>
+                        <a:rPr sz="1000" b="1">
+                          <a:solidFill>
+                            <a:srgbClr val="E00000"/>
+                          </a:solidFill>
+                          <a:latin typeface="맑은 고딕"/>
+                          <a:ea typeface="맑은 고딕"/>
+                          <a:cs typeface="맑은 고딕"/>
+                        </a:rPr>
+                        <a:t>【발급일】</a:t>
+                      </a:r>
+                    </a:p>
+                  </a:txBody>
+                  <a:tcPr marL="36000" marR="36000" marT="18000" marB="18000" anchor="ctr">
+                    <a:lnL w="10160">
+                      <a:solidFill>
+                        <a:srgbClr val="C8D3E0"/>
+                      </a:solidFill>
+                    </a:lnL>
+                    <a:lnR w="10160">
+                      <a:solidFill>
+                        <a:srgbClr val="C8D3E0"/>
+                      </a:solidFill>
+                    </a:lnR>
+                    <a:lnT w="10160">
+                      <a:solidFill>
+                        <a:srgbClr val="C8D3E0"/>
+                      </a:solidFill>
+                    </a:lnT>
+                    <a:lnB w="10160">
+                      <a:solidFill>
+                        <a:srgbClr val="C8D3E0"/>
+                      </a:solidFill>
+                    </a:lnB>
+                    <a:solidFill>
+                      <a:srgbClr val="FFFFFF"/>
+                    </a:solidFill>
+                  </a:tcPr>
+                </a:tc>
+                <a:tc>
+                  <a:txBody>
+                    <a:bodyPr wrap="square"/>
+                    <a:lstStyle/>
+                    <a:p>
+                      <a:pPr algn="ctr">
+                        <a:lnSpc>
+                          <a:spcPct val="115000"/>
+                        </a:lnSpc>
+                        <a:spcBef>
+                          <a:spcPts val="0"/>
+                        </a:spcBef>
+                        <a:spcAft>
+                          <a:spcPts val="0"/>
+                        </a:spcAft>
+                      </a:pPr>
+                      <a:r>
+                        <a:rPr sz="1000" b="1">
+                          <a:solidFill>
+                            <a:srgbClr val="E00000"/>
+                          </a:solidFill>
+                          <a:latin typeface="맑은 고딕"/>
+                          <a:ea typeface="맑은 고딕"/>
+                          <a:cs typeface="맑은 고딕"/>
+                        </a:rPr>
+                        <a:t>【○】</a:t>
+                      </a:r>
+                    </a:p>
+                  </a:txBody>
+                  <a:tcPr marL="36000" marR="36000" marT="18000" marB="18000" anchor="ctr">
+                    <a:lnL w="10160">
+                      <a:solidFill>
+                        <a:srgbClr val="C8D3E0"/>
+                      </a:solidFill>
+                    </a:lnL>
+                    <a:lnR w="10160">
+                      <a:solidFill>
+                        <a:srgbClr val="C8D3E0"/>
+                      </a:solidFill>
+                    </a:lnR>
+                    <a:lnT w="10160">
+                      <a:solidFill>
+                        <a:srgbClr val="C8D3E0"/>
+                      </a:solidFill>
+                    </a:lnT>
+                    <a:lnB w="10160">
+                      <a:solidFill>
+                        <a:srgbClr val="C8D3E0"/>
+                      </a:solidFill>
+                    </a:lnB>
+                    <a:solidFill>
+                      <a:srgbClr val="FFFFFF"/>
+                    </a:solidFill>
+                  </a:tcPr>
+                </a:tc>
+                <a:tc>
+                  <a:txBody>
+                    <a:bodyPr wrap="square"/>
+                    <a:lstStyle/>
+                    <a:p>
+                      <a:pPr algn="ctr">
+                        <a:lnSpc>
+                          <a:spcPct val="115000"/>
+                        </a:lnSpc>
+                        <a:spcBef>
+                          <a:spcPts val="0"/>
+                        </a:spcBef>
+                        <a:spcAft>
+                          <a:spcPts val="0"/>
+                        </a:spcAft>
+                      </a:pPr>
+                      <a:r>
+                        <a:rPr sz="1000" b="1">
+                          <a:solidFill>
+                            <a:srgbClr val="E00000"/>
+                          </a:solidFill>
+                          <a:latin typeface="맑은 고딕"/>
+                          <a:ea typeface="맑은 고딕"/>
+                          <a:cs typeface="맑은 고딕"/>
+                        </a:rPr>
+                        <a:t>【○】</a:t>
+                      </a:r>
+                    </a:p>
+                  </a:txBody>
+                  <a:tcPr marL="36000" marR="36000" marT="18000" marB="18000" anchor="ctr">
+                    <a:lnL w="10160">
+                      <a:solidFill>
+                        <a:srgbClr val="C8D3E0"/>
+                      </a:solidFill>
+                    </a:lnL>
+                    <a:lnR w="10160">
+                      <a:solidFill>
+                        <a:srgbClr val="C8D3E0"/>
+                      </a:solidFill>
+                    </a:lnR>
+                    <a:lnT w="10160">
+                      <a:solidFill>
+                        <a:srgbClr val="C8D3E0"/>
+                      </a:solidFill>
+                    </a:lnT>
+                    <a:lnB w="10160">
+                      <a:solidFill>
+                        <a:srgbClr val="C8D3E0"/>
+                      </a:solidFill>
+                    </a:lnB>
+                    <a:solidFill>
+                      <a:srgbClr val="FFFFFF"/>
+                    </a:solidFill>
+                  </a:tcPr>
+                </a:tc>
+                <a:tc>
+                  <a:txBody>
+                    <a:bodyPr wrap="square"/>
+                    <a:lstStyle/>
+                    <a:p>
+                      <a:pPr algn="l">
+                        <a:lnSpc>
+                          <a:spcPct val="115000"/>
+                        </a:lnSpc>
+                        <a:spcBef>
+                          <a:spcPts val="0"/>
+                        </a:spcBef>
+                        <a:spcAft>
+                          <a:spcPts val="0"/>
+                        </a:spcAft>
+                      </a:pPr>
+                      <a:r>
+                        <a:rPr sz="1000" b="1">
+                          <a:solidFill>
+                            <a:srgbClr val="E00000"/>
+                          </a:solidFill>
+                          <a:latin typeface="맑은 고딕"/>
+                          <a:ea typeface="맑은 고딕"/>
+                          <a:cs typeface="맑은 고딕"/>
+                        </a:rPr>
+                        <a:t>【쪽】</a:t>
+                      </a:r>
+                    </a:p>
+                  </a:txBody>
+                  <a:tcPr marL="36000" marR="36000" marT="18000" marB="18000" anchor="ctr">
+                    <a:lnL w="10160">
+                      <a:solidFill>
+                        <a:srgbClr val="C8D3E0"/>
+                      </a:solidFill>
+                    </a:lnL>
+                    <a:lnR w="10160">
+                      <a:solidFill>
+                        <a:srgbClr val="C8D3E0"/>
+                      </a:solidFill>
+                    </a:lnR>
+                    <a:lnT w="10160">
+                      <a:solidFill>
+                        <a:srgbClr val="C8D3E0"/>
+                      </a:solidFill>
+                    </a:lnT>
+                    <a:lnB w="10160">
+                      <a:solidFill>
+                        <a:srgbClr val="C8D3E0"/>
+                      </a:solidFill>
+                    </a:lnB>
+                    <a:solidFill>
+                      <a:srgbClr val="FFFFFF"/>
+                    </a:solidFill>
+                  </a:tcPr>
+                </a:tc>
+              </a:tr>
+              <a:tr h="413999">
+                <a:tc>
+                  <a:txBody>
+                    <a:bodyPr wrap="square"/>
+                    <a:lstStyle/>
+                    <a:p>
+                      <a:pPr algn="ctr">
+                        <a:lnSpc>
+                          <a:spcPct val="115000"/>
+                        </a:lnSpc>
+                        <a:spcBef>
+                          <a:spcPts val="0"/>
+                        </a:spcBef>
+                        <a:spcAft>
+                          <a:spcPts val="0"/>
+                        </a:spcAft>
+                      </a:pPr>
+                      <a:r>
+                        <a:rPr sz="1000" b="1">
+                          <a:solidFill>
+                            <a:srgbClr val="222222"/>
+                          </a:solidFill>
+                          <a:latin typeface="맑은 고딕"/>
+                          <a:ea typeface="맑은 고딕"/>
+                          <a:cs typeface="맑은 고딕"/>
+                        </a:rPr>
+                        <a:t>9</a:t>
+                      </a:r>
+                    </a:p>
+                  </a:txBody>
+                  <a:tcPr marL="36000" marR="36000" marT="18000" marB="18000" anchor="ctr">
+                    <a:lnL w="10160">
+                      <a:solidFill>
+                        <a:srgbClr val="C8D3E0"/>
+                      </a:solidFill>
+                    </a:lnL>
+                    <a:lnR w="10160">
+                      <a:solidFill>
+                        <a:srgbClr val="C8D3E0"/>
+                      </a:solidFill>
+                    </a:lnR>
+                    <a:lnT w="10160">
+                      <a:solidFill>
+                        <a:srgbClr val="C8D3E0"/>
+                      </a:solidFill>
+                    </a:lnT>
+                    <a:lnB w="10160">
+                      <a:solidFill>
+                        <a:srgbClr val="C8D3E0"/>
+                      </a:solidFill>
+                    </a:lnB>
+                    <a:solidFill>
+                      <a:srgbClr val="EEF3F9"/>
+                    </a:solidFill>
+                  </a:tcPr>
+                </a:tc>
+                <a:tc>
+                  <a:txBody>
+                    <a:bodyPr wrap="square"/>
+                    <a:lstStyle/>
+                    <a:p>
+                      <a:pPr algn="ctr">
+                        <a:lnSpc>
+                          <a:spcPct val="115000"/>
+                        </a:lnSpc>
+                        <a:spcBef>
+                          <a:spcPts val="0"/>
+                        </a:spcBef>
+                        <a:spcAft>
+                          <a:spcPts val="0"/>
+                        </a:spcAft>
+                      </a:pPr>
+                      <a:r>
+                        <a:rPr sz="1000" b="0">
+                          <a:solidFill>
+                            <a:srgbClr val="222222"/>
+                          </a:solidFill>
+                          <a:latin typeface="맑은 고딕"/>
+                          <a:ea typeface="맑은 고딕"/>
+                          <a:cs typeface="맑은 고딕"/>
+                        </a:rPr>
+                        <a:t>CELLO SQUARE 통합운영플랫폼 구축</a:t>
+                      </a:r>
+                    </a:p>
+                  </a:txBody>
+                  <a:tcPr marL="36000" marR="36000" marT="18000" marB="18000" anchor="ctr">
+                    <a:lnL w="10160">
+                      <a:solidFill>
+                        <a:srgbClr val="C8D3E0"/>
+                      </a:solidFill>
+                    </a:lnL>
+                    <a:lnR w="10160">
+                      <a:solidFill>
+                        <a:srgbClr val="C8D3E0"/>
+                      </a:solidFill>
+                    </a:lnR>
+                    <a:lnT w="10160">
+                      <a:solidFill>
+                        <a:srgbClr val="C8D3E0"/>
+                      </a:solidFill>
+                    </a:lnT>
+                    <a:lnB w="10160">
+                      <a:solidFill>
+                        <a:srgbClr val="C8D3E0"/>
+                      </a:solidFill>
+                    </a:lnB>
+                    <a:solidFill>
+                      <a:srgbClr val="FFFFFF"/>
+                    </a:solidFill>
+                  </a:tcPr>
+                </a:tc>
+                <a:tc>
+                  <a:txBody>
+                    <a:bodyPr wrap="square"/>
+                    <a:lstStyle/>
+                    <a:p>
+                      <a:pPr algn="ctr">
+                        <a:lnSpc>
+                          <a:spcPct val="115000"/>
+                        </a:lnSpc>
+                        <a:spcBef>
+                          <a:spcPts val="0"/>
+                        </a:spcBef>
+                        <a:spcAft>
+                          <a:spcPts val="0"/>
+                        </a:spcAft>
+                      </a:pPr>
+                      <a:r>
+                        <a:rPr sz="1000" b="1">
+                          <a:solidFill>
+                            <a:srgbClr val="E00000"/>
+                          </a:solidFill>
+                          <a:latin typeface="맑은 고딕"/>
+                          <a:ea typeface="맑은 고딕"/>
+                          <a:cs typeface="맑은 고딕"/>
+                        </a:rPr>
+                        <a:t>【발급일】</a:t>
+                      </a:r>
+                    </a:p>
+                  </a:txBody>
+                  <a:tcPr marL="36000" marR="36000" marT="18000" marB="18000" anchor="ctr">
+                    <a:lnL w="10160">
+                      <a:solidFill>
+                        <a:srgbClr val="C8D3E0"/>
+                      </a:solidFill>
+                    </a:lnL>
+                    <a:lnR w="10160">
+                      <a:solidFill>
+                        <a:srgbClr val="C8D3E0"/>
+                      </a:solidFill>
+                    </a:lnR>
+                    <a:lnT w="10160">
+                      <a:solidFill>
+                        <a:srgbClr val="C8D3E0"/>
+                      </a:solidFill>
+                    </a:lnT>
+                    <a:lnB w="10160">
+                      <a:solidFill>
+                        <a:srgbClr val="C8D3E0"/>
+                      </a:solidFill>
+                    </a:lnB>
+                    <a:solidFill>
+                      <a:srgbClr val="FFFFFF"/>
+                    </a:solidFill>
+                  </a:tcPr>
+                </a:tc>
+                <a:tc>
+                  <a:txBody>
+                    <a:bodyPr wrap="square"/>
+                    <a:lstStyle/>
+                    <a:p>
+                      <a:pPr algn="ctr">
+                        <a:lnSpc>
+                          <a:spcPct val="115000"/>
+                        </a:lnSpc>
+                        <a:spcBef>
+                          <a:spcPts val="0"/>
+                        </a:spcBef>
+                        <a:spcAft>
+                          <a:spcPts val="0"/>
+                        </a:spcAft>
+                      </a:pPr>
+                      <a:r>
+                        <a:rPr sz="1000" b="1">
+                          <a:solidFill>
+                            <a:srgbClr val="E00000"/>
+                          </a:solidFill>
+                          <a:latin typeface="맑은 고딕"/>
+                          <a:ea typeface="맑은 고딕"/>
+                          <a:cs typeface="맑은 고딕"/>
+                        </a:rPr>
+                        <a:t>【○】</a:t>
+                      </a:r>
+                    </a:p>
+                  </a:txBody>
+                  <a:tcPr marL="36000" marR="36000" marT="18000" marB="18000" anchor="ctr">
+                    <a:lnL w="10160">
+                      <a:solidFill>
+                        <a:srgbClr val="C8D3E0"/>
+                      </a:solidFill>
+                    </a:lnL>
+                    <a:lnR w="10160">
+                      <a:solidFill>
+                        <a:srgbClr val="C8D3E0"/>
+                      </a:solidFill>
+                    </a:lnR>
+                    <a:lnT w="10160">
+                      <a:solidFill>
+                        <a:srgbClr val="C8D3E0"/>
+                      </a:solidFill>
+                    </a:lnT>
+                    <a:lnB w="10160">
+                      <a:solidFill>
+                        <a:srgbClr val="C8D3E0"/>
+                      </a:solidFill>
+                    </a:lnB>
+                    <a:solidFill>
+                      <a:srgbClr val="FFFFFF"/>
+                    </a:solidFill>
+                  </a:tcPr>
+                </a:tc>
+                <a:tc>
+                  <a:txBody>
+                    <a:bodyPr wrap="square"/>
+                    <a:lstStyle/>
+                    <a:p>
+                      <a:pPr algn="ctr">
+                        <a:lnSpc>
+                          <a:spcPct val="115000"/>
+                        </a:lnSpc>
+                        <a:spcBef>
+                          <a:spcPts val="0"/>
+                        </a:spcBef>
+                        <a:spcAft>
+                          <a:spcPts val="0"/>
+                        </a:spcAft>
+                      </a:pPr>
+                      <a:r>
+                        <a:rPr sz="1000" b="1">
+                          <a:solidFill>
+                            <a:srgbClr val="E00000"/>
+                          </a:solidFill>
+                          <a:latin typeface="맑은 고딕"/>
+                          <a:ea typeface="맑은 고딕"/>
+                          <a:cs typeface="맑은 고딕"/>
+                        </a:rPr>
+                        <a:t>【○】</a:t>
+                      </a:r>
+                    </a:p>
+                  </a:txBody>
+                  <a:tcPr marL="36000" marR="36000" marT="18000" marB="18000" anchor="ctr">
+                    <a:lnL w="10160">
+                      <a:solidFill>
+                        <a:srgbClr val="C8D3E0"/>
+                      </a:solidFill>
+                    </a:lnL>
+                    <a:lnR w="10160">
+                      <a:solidFill>
+                        <a:srgbClr val="C8D3E0"/>
+                      </a:solidFill>
+                    </a:lnR>
+                    <a:lnT w="10160">
+                      <a:solidFill>
+                        <a:srgbClr val="C8D3E0"/>
+                      </a:solidFill>
+                    </a:lnT>
+                    <a:lnB w="10160">
+                      <a:solidFill>
+                        <a:srgbClr val="C8D3E0"/>
+                      </a:solidFill>
+                    </a:lnB>
+                    <a:solidFill>
+                      <a:srgbClr val="FFFFFF"/>
+                    </a:solidFill>
+                  </a:tcPr>
+                </a:tc>
+                <a:tc>
+                  <a:txBody>
+                    <a:bodyPr wrap="square"/>
+                    <a:lstStyle/>
+                    <a:p>
+                      <a:pPr algn="l">
+                        <a:lnSpc>
+                          <a:spcPct val="115000"/>
+                        </a:lnSpc>
+                        <a:spcBef>
+                          <a:spcPts val="0"/>
+                        </a:spcBef>
+                        <a:spcAft>
+                          <a:spcPts val="0"/>
+                        </a:spcAft>
+                      </a:pPr>
+                      <a:r>
+                        <a:rPr sz="1000" b="1">
                           <a:solidFill>
                             <a:srgbClr val="E00000"/>
                           </a:solidFill>
@@ -26269,8 +29169,8 @@
         </p:nvSpPr>
         <p:spPr>
           <a:xfrm>
-            <a:off x="316800" y="7209846"/>
-            <a:ext cx="2026800" cy="1332000"/>
+            <a:off x="316800" y="7331256"/>
+            <a:ext cx="2026800" cy="1007999"/>
           </a:xfrm>
           <a:prstGeom prst="rect">
             <a:avLst/>
@@ -26315,7 +29215,7 @@
         </p:nvSpPr>
         <p:spPr>
           <a:xfrm>
-            <a:off x="316800" y="7209846"/>
+            <a:off x="316800" y="7331256"/>
             <a:ext cx="2026800" cy="234000"/>
           </a:xfrm>
           <a:prstGeom prst="rect">
@@ -26380,8 +29280,8 @@
         </p:nvSpPr>
         <p:spPr>
           <a:xfrm>
-            <a:off x="352800" y="7469046"/>
-            <a:ext cx="1954800" cy="1080000"/>
+            <a:off x="352800" y="7590455"/>
+            <a:ext cx="1954800" cy="756000"/>
           </a:xfrm>
           <a:prstGeom prst="rect">
             <a:avLst/>
@@ -26406,7 +29306,7 @@
               </a:spcAft>
             </a:pPr>
             <a:r>
-              <a:rPr sz="1200" b="0">
+              <a:rPr sz="1050" b="0">
                 <a:solidFill>
                   <a:srgbClr val="000000"/>
                 </a:solidFill>
@@ -26417,7 +29317,7 @@
               <a:t>에스케이㈜ 실적증명서 신청 (발급 2~3일 소요) </a:t>
             </a:r>
             <a:r>
-              <a:rPr sz="1200" b="1">
+              <a:rPr sz="1050" b="1">
                 <a:solidFill>
                   <a:srgbClr val="E00000"/>
                 </a:solidFill>
@@ -26438,8 +29338,8 @@
         </p:nvSpPr>
         <p:spPr>
           <a:xfrm>
-            <a:off x="2433600" y="7209846"/>
-            <a:ext cx="2026800" cy="1332000"/>
+            <a:off x="2433600" y="7331256"/>
+            <a:ext cx="2026800" cy="1007999"/>
           </a:xfrm>
           <a:prstGeom prst="rect">
             <a:avLst/>
@@ -26484,7 +29384,7 @@
         </p:nvSpPr>
         <p:spPr>
           <a:xfrm>
-            <a:off x="2433600" y="7209846"/>
+            <a:off x="2433600" y="7331256"/>
             <a:ext cx="2026800" cy="234000"/>
           </a:xfrm>
           <a:prstGeom prst="rect">
@@ -26549,8 +29449,8 @@
         </p:nvSpPr>
         <p:spPr>
           <a:xfrm>
-            <a:off x="2469600" y="7469046"/>
-            <a:ext cx="1954800" cy="1080000"/>
+            <a:off x="2469600" y="7590455"/>
+            <a:ext cx="1954800" cy="756000"/>
           </a:xfrm>
           <a:prstGeom prst="rect">
             <a:avLst/>
@@ -26575,7 +29475,7 @@
               </a:spcAft>
             </a:pPr>
             <a:r>
-              <a:rPr sz="1200" b="0">
+              <a:rPr sz="1050" b="0">
                 <a:solidFill>
                   <a:srgbClr val="000000"/>
                 </a:solidFill>
@@ -26596,8 +29496,8 @@
         </p:nvSpPr>
         <p:spPr>
           <a:xfrm>
-            <a:off x="4550400" y="7209846"/>
-            <a:ext cx="2026800" cy="1332000"/>
+            <a:off x="4550400" y="7331256"/>
+            <a:ext cx="2026800" cy="1007999"/>
           </a:xfrm>
           <a:prstGeom prst="rect">
             <a:avLst/>
@@ -26642,7 +29542,7 @@
         </p:nvSpPr>
         <p:spPr>
           <a:xfrm>
-            <a:off x="4550400" y="7209846"/>
+            <a:off x="4550400" y="7331256"/>
             <a:ext cx="2026800" cy="234000"/>
           </a:xfrm>
           <a:prstGeom prst="rect">
@@ -26707,8 +29607,8 @@
         </p:nvSpPr>
         <p:spPr>
           <a:xfrm>
-            <a:off x="4586400" y="7469046"/>
-            <a:ext cx="1954800" cy="1080000"/>
+            <a:off x="4586400" y="7590455"/>
+            <a:ext cx="1954800" cy="756000"/>
           </a:xfrm>
           <a:prstGeom prst="rect">
             <a:avLst/>
@@ -26733,7 +29633,7 @@
               </a:spcAft>
             </a:pPr>
             <a:r>
-              <a:rPr sz="1200" b="0">
+              <a:rPr sz="1050" b="0">
                 <a:solidFill>
                   <a:srgbClr val="000000"/>
                 </a:solidFill>
@@ -26754,7 +29654,7 @@
         </p:nvSpPr>
         <p:spPr>
           <a:xfrm>
-            <a:off x="280800" y="8649846"/>
+            <a:off x="280800" y="8447255"/>
             <a:ext cx="6332400" cy="180000"/>
           </a:xfrm>
           <a:prstGeom prst="rect">
